--- a/media/figstudio/bzso_roadmap/roadmap_bazn2si2o7_en_editable.pptx
+++ b/media/figstudio/bzso_roadmap/roadmap_bazn2si2o7_en_editable.pptx
@@ -3535,7 +3535,7 @@
           <a:solidFill>
             <a:srgbClr val="EEF2F7"/>
           </a:solidFill>
-          <a:ln w="9524">
+          <a:ln w="12699">
             <a:solidFill>
               <a:srgbClr val="5B7592"/>
             </a:solidFill>
@@ -3639,7 +3639,7 @@
           <a:solidFill>
             <a:srgbClr val="E6F2F3"/>
           </a:solidFill>
-          <a:ln w="9524">
+          <a:ln w="12699">
             <a:solidFill>
               <a:srgbClr val="1F7F8C"/>
             </a:solidFill>
@@ -3743,7 +3743,7 @@
           <a:solidFill>
             <a:srgbClr val="FFFFFF"/>
           </a:solidFill>
-          <a:ln w="11112">
+          <a:ln w="15081">
             <a:solidFill>
               <a:srgbClr val="5B7592"/>
             </a:solidFill>
@@ -3888,9 +3888,9 @@
           <a:prstGeom prst="line">
             <a:avLst/>
           </a:prstGeom>
-          <a:ln w="14604">
+          <a:ln w="19716">
             <a:solidFill>
-              <a:srgbClr val="1F2937"/>
+              <a:srgbClr val="111A24"/>
             </a:solidFill>
           </a:ln>
           <a:effectLst/>
@@ -3924,9 +3924,9 @@
           <a:prstGeom prst="line">
             <a:avLst/>
           </a:prstGeom>
-          <a:ln w="14604">
+          <a:ln w="19716">
             <a:solidFill>
-              <a:srgbClr val="1F2937"/>
+              <a:srgbClr val="111A24"/>
             </a:solidFill>
           </a:ln>
           <a:effectLst/>
@@ -3960,9 +3960,9 @@
           <a:prstGeom prst="line">
             <a:avLst/>
           </a:prstGeom>
-          <a:ln w="14604">
+          <a:ln w="19716">
             <a:solidFill>
-              <a:srgbClr val="1F2937"/>
+              <a:srgbClr val="111A24"/>
             </a:solidFill>
           </a:ln>
           <a:effectLst/>
@@ -3996,9 +3996,9 @@
           <a:prstGeom prst="line">
             <a:avLst/>
           </a:prstGeom>
-          <a:ln w="14604">
+          <a:ln w="19716">
             <a:solidFill>
-              <a:srgbClr val="1F2937"/>
+              <a:srgbClr val="111A24"/>
             </a:solidFill>
           </a:ln>
           <a:effectLst/>
@@ -4032,9 +4032,9 @@
           <a:prstGeom prst="line">
             <a:avLst/>
           </a:prstGeom>
-          <a:ln w="14604">
+          <a:ln w="19716">
             <a:solidFill>
-              <a:srgbClr val="1F2937"/>
+              <a:srgbClr val="111A24"/>
             </a:solidFill>
           </a:ln>
           <a:effectLst/>
@@ -4068,9 +4068,9 @@
           <a:prstGeom prst="line">
             <a:avLst/>
           </a:prstGeom>
-          <a:ln w="14604">
+          <a:ln w="19716">
             <a:solidFill>
-              <a:srgbClr val="1F2937"/>
+              <a:srgbClr val="111A24"/>
             </a:solidFill>
           </a:ln>
           <a:effectLst/>
@@ -4104,9 +4104,9 @@
           <a:prstGeom prst="line">
             <a:avLst/>
           </a:prstGeom>
-          <a:ln w="14604">
+          <a:ln w="19716">
             <a:solidFill>
-              <a:srgbClr val="1F2937"/>
+              <a:srgbClr val="111A24"/>
             </a:solidFill>
           </a:ln>
           <a:effectLst/>
@@ -4196,9 +4196,9 @@
           <a:prstGeom prst="line">
             <a:avLst/>
           </a:prstGeom>
-          <a:ln w="9524">
+          <a:ln w="12699">
             <a:solidFill>
-              <a:srgbClr val="E3E8ED"/>
+              <a:srgbClr val="CBD5DE"/>
             </a:solidFill>
           </a:ln>
           <a:effectLst/>
@@ -4235,11 +4235,11 @@
             </a:avLst>
           </a:prstGeom>
           <a:solidFill>
-            <a:srgbClr val="F7F9FB"/>
+            <a:srgbClr val="F4F7FA"/>
           </a:solidFill>
-          <a:ln w="9524">
+          <a:ln w="12699">
             <a:solidFill>
-              <a:srgbClr val="CBD3DA"/>
+              <a:srgbClr val="AEBBC7"/>
             </a:solidFill>
           </a:ln>
           <a:effectLst/>
@@ -4299,9 +4299,9 @@
               <a:spcAft>
                 <a:spcPts val="0"/>
               </a:spcAft>
-              <a:defRPr sz="1124" b="0" i="0" lang="zh-CN" dirty="0">
+              <a:defRPr sz="1124" b="1" i="0" lang="zh-CN" dirty="0">
                 <a:solidFill>
-                  <a:srgbClr val="3F4854"/>
+                  <a:srgbClr val="27303A"/>
                 </a:solidFill>
                 <a:latin typeface="DejaVu Sans"/>
                 <a:ea typeface="DejaVu Sans"/>
@@ -4309,9 +4309,9 @@
               </a:defRPr>
             </a:pPr>
             <a:r>
-              <a:rPr sz="1124" b="0" i="0" lang="zh-CN" dirty="0">
+              <a:rPr sz="1124" b="1" i="0" lang="zh-CN" dirty="0">
                 <a:solidFill>
-                  <a:srgbClr val="3F4854"/>
+                  <a:srgbClr val="27303A"/>
                 </a:solidFill>
                 <a:latin typeface="DejaVu Sans"/>
                 <a:ea typeface="DejaVu Sans"/>
@@ -4341,7 +4341,7 @@
           <a:solidFill>
             <a:srgbClr val="FFFFFF"/>
           </a:solidFill>
-          <a:ln w="11112">
+          <a:ln w="15081">
             <a:solidFill>
               <a:srgbClr val="5B7592"/>
             </a:solidFill>
@@ -4486,9 +4486,9 @@
           <a:prstGeom prst="line">
             <a:avLst/>
           </a:prstGeom>
-          <a:ln w="14604">
+          <a:ln w="19716">
             <a:solidFill>
-              <a:srgbClr val="1F2937"/>
+              <a:srgbClr val="111A24"/>
             </a:solidFill>
           </a:ln>
           <a:effectLst/>
@@ -4522,9 +4522,9 @@
           <a:prstGeom prst="line">
             <a:avLst/>
           </a:prstGeom>
-          <a:ln w="14604">
+          <a:ln w="19716">
             <a:solidFill>
-              <a:srgbClr val="1F2937"/>
+              <a:srgbClr val="111A24"/>
             </a:solidFill>
           </a:ln>
           <a:effectLst/>
@@ -4558,9 +4558,9 @@
           <a:prstGeom prst="line">
             <a:avLst/>
           </a:prstGeom>
-          <a:ln w="14604">
+          <a:ln w="19716">
             <a:solidFill>
-              <a:srgbClr val="1F2937"/>
+              <a:srgbClr val="111A24"/>
             </a:solidFill>
           </a:ln>
           <a:effectLst/>
@@ -4594,9 +4594,9 @@
           <a:prstGeom prst="line">
             <a:avLst/>
           </a:prstGeom>
-          <a:ln w="14604">
+          <a:ln w="19716">
             <a:solidFill>
-              <a:srgbClr val="1F2937"/>
+              <a:srgbClr val="111A24"/>
             </a:solidFill>
           </a:ln>
           <a:effectLst/>
@@ -4686,9 +4686,9 @@
           <a:prstGeom prst="line">
             <a:avLst/>
           </a:prstGeom>
-          <a:ln w="9524">
+          <a:ln w="12699">
             <a:solidFill>
-              <a:srgbClr val="E3E8ED"/>
+              <a:srgbClr val="CBD5DE"/>
             </a:solidFill>
           </a:ln>
           <a:effectLst/>
@@ -4725,11 +4725,11 @@
             </a:avLst>
           </a:prstGeom>
           <a:solidFill>
-            <a:srgbClr val="F7F9FB"/>
+            <a:srgbClr val="F4F7FA"/>
           </a:solidFill>
-          <a:ln w="9524">
+          <a:ln w="12699">
             <a:solidFill>
-              <a:srgbClr val="CBD3DA"/>
+              <a:srgbClr val="AEBBC7"/>
             </a:solidFill>
           </a:ln>
           <a:effectLst/>
@@ -4789,9 +4789,9 @@
               <a:spcAft>
                 <a:spcPts val="0"/>
               </a:spcAft>
-              <a:defRPr sz="1124" b="0" i="0" lang="zh-CN" dirty="0">
+              <a:defRPr sz="1124" b="1" i="0" lang="zh-CN" dirty="0">
                 <a:solidFill>
-                  <a:srgbClr val="3F4854"/>
+                  <a:srgbClr val="27303A"/>
                 </a:solidFill>
                 <a:latin typeface="DejaVu Sans"/>
                 <a:ea typeface="DejaVu Sans"/>
@@ -4799,9 +4799,9 @@
               </a:defRPr>
             </a:pPr>
             <a:r>
-              <a:rPr sz="1124" b="0" i="0" lang="zh-CN" dirty="0">
+              <a:rPr sz="1124" b="1" i="0" lang="zh-CN" dirty="0">
                 <a:solidFill>
-                  <a:srgbClr val="3F4854"/>
+                  <a:srgbClr val="27303A"/>
                 </a:solidFill>
                 <a:latin typeface="DejaVu Sans"/>
                 <a:ea typeface="DejaVu Sans"/>
@@ -4831,7 +4831,7 @@
           <a:solidFill>
             <a:srgbClr val="FFFFFF"/>
           </a:solidFill>
-          <a:ln w="11112">
+          <a:ln w="15081">
             <a:solidFill>
               <a:srgbClr val="5B7592"/>
             </a:solidFill>
@@ -4976,9 +4976,9 @@
           <a:prstGeom prst="line">
             <a:avLst/>
           </a:prstGeom>
-          <a:ln w="14604">
+          <a:ln w="19716">
             <a:solidFill>
-              <a:srgbClr val="1F2937"/>
+              <a:srgbClr val="111A24"/>
             </a:solidFill>
           </a:ln>
           <a:effectLst/>
@@ -5012,9 +5012,9 @@
           <a:prstGeom prst="line">
             <a:avLst/>
           </a:prstGeom>
-          <a:ln w="14604">
+          <a:ln w="19716">
             <a:solidFill>
-              <a:srgbClr val="1F2937"/>
+              <a:srgbClr val="111A24"/>
             </a:solidFill>
           </a:ln>
           <a:effectLst/>
@@ -5048,9 +5048,9 @@
           <a:prstGeom prst="line">
             <a:avLst/>
           </a:prstGeom>
-          <a:ln w="14604">
+          <a:ln w="19716">
             <a:solidFill>
-              <a:srgbClr val="1F2937"/>
+              <a:srgbClr val="111A24"/>
             </a:solidFill>
           </a:ln>
           <a:effectLst/>
@@ -5084,9 +5084,9 @@
           <a:prstGeom prst="line">
             <a:avLst/>
           </a:prstGeom>
-          <a:ln w="14604">
+          <a:ln w="19716">
             <a:solidFill>
-              <a:srgbClr val="1F2937"/>
+              <a:srgbClr val="111A24"/>
             </a:solidFill>
           </a:ln>
           <a:effectLst/>
@@ -5120,9 +5120,9 @@
           <a:prstGeom prst="line">
             <a:avLst/>
           </a:prstGeom>
-          <a:ln w="14604">
+          <a:ln w="19716">
             <a:solidFill>
-              <a:srgbClr val="1F2937"/>
+              <a:srgbClr val="111A24"/>
             </a:solidFill>
           </a:ln>
           <a:effectLst/>
@@ -5156,9 +5156,9 @@
           <a:prstGeom prst="line">
             <a:avLst/>
           </a:prstGeom>
-          <a:ln w="14604">
+          <a:ln w="19716">
             <a:solidFill>
-              <a:srgbClr val="1F2937"/>
+              <a:srgbClr val="111A24"/>
             </a:solidFill>
           </a:ln>
           <a:effectLst/>
@@ -5192,9 +5192,9 @@
           <a:prstGeom prst="line">
             <a:avLst/>
           </a:prstGeom>
-          <a:ln w="14604">
+          <a:ln w="19716">
             <a:solidFill>
-              <a:srgbClr val="1F2937"/>
+              <a:srgbClr val="111A24"/>
             </a:solidFill>
           </a:ln>
           <a:effectLst/>
@@ -5228,9 +5228,9 @@
           <a:prstGeom prst="line">
             <a:avLst/>
           </a:prstGeom>
-          <a:ln w="14604">
+          <a:ln w="19716">
             <a:solidFill>
-              <a:srgbClr val="1F2937"/>
+              <a:srgbClr val="111A24"/>
             </a:solidFill>
           </a:ln>
           <a:effectLst/>
@@ -5264,9 +5264,9 @@
           <a:prstGeom prst="line">
             <a:avLst/>
           </a:prstGeom>
-          <a:ln w="14604">
+          <a:ln w="19716">
             <a:solidFill>
-              <a:srgbClr val="1F2937"/>
+              <a:srgbClr val="111A24"/>
             </a:solidFill>
           </a:ln>
           <a:effectLst/>
@@ -5300,9 +5300,9 @@
           <a:prstGeom prst="line">
             <a:avLst/>
           </a:prstGeom>
-          <a:ln w="14604">
+          <a:ln w="19716">
             <a:solidFill>
-              <a:srgbClr val="1F2937"/>
+              <a:srgbClr val="111A24"/>
             </a:solidFill>
           </a:ln>
           <a:effectLst/>
@@ -5336,9 +5336,9 @@
           <a:prstGeom prst="line">
             <a:avLst/>
           </a:prstGeom>
-          <a:ln w="14604">
+          <a:ln w="19716">
             <a:solidFill>
-              <a:srgbClr val="1F2937"/>
+              <a:srgbClr val="111A24"/>
             </a:solidFill>
           </a:ln>
           <a:effectLst/>
@@ -5372,9 +5372,9 @@
           <a:prstGeom prst="line">
             <a:avLst/>
           </a:prstGeom>
-          <a:ln w="14604">
+          <a:ln w="19716">
             <a:solidFill>
-              <a:srgbClr val="1F2937"/>
+              <a:srgbClr val="111A24"/>
             </a:solidFill>
           </a:ln>
           <a:effectLst/>
@@ -5464,9 +5464,9 @@
           <a:prstGeom prst="line">
             <a:avLst/>
           </a:prstGeom>
-          <a:ln w="9524">
+          <a:ln w="12699">
             <a:solidFill>
-              <a:srgbClr val="E3E8ED"/>
+              <a:srgbClr val="CBD5DE"/>
             </a:solidFill>
           </a:ln>
           <a:effectLst/>
@@ -5503,11 +5503,11 @@
             </a:avLst>
           </a:prstGeom>
           <a:solidFill>
-            <a:srgbClr val="F7F9FB"/>
+            <a:srgbClr val="F4F7FA"/>
           </a:solidFill>
-          <a:ln w="9524">
+          <a:ln w="12699">
             <a:solidFill>
-              <a:srgbClr val="CBD3DA"/>
+              <a:srgbClr val="AEBBC7"/>
             </a:solidFill>
           </a:ln>
           <a:effectLst/>
@@ -5567,9 +5567,9 @@
               <a:spcAft>
                 <a:spcPts val="0"/>
               </a:spcAft>
-              <a:defRPr sz="1124" b="0" i="0" lang="zh-CN" dirty="0">
+              <a:defRPr sz="1124" b="1" i="0" lang="zh-CN" dirty="0">
                 <a:solidFill>
-                  <a:srgbClr val="3F4854"/>
+                  <a:srgbClr val="27303A"/>
                 </a:solidFill>
                 <a:latin typeface="DejaVu Sans"/>
                 <a:ea typeface="DejaVu Sans"/>
@@ -5577,9 +5577,9 @@
               </a:defRPr>
             </a:pPr>
             <a:r>
-              <a:rPr sz="1124" b="0" i="0" lang="zh-CN" dirty="0">
+              <a:rPr sz="1124" b="1" i="0" lang="zh-CN" dirty="0">
                 <a:solidFill>
-                  <a:srgbClr val="3F4854"/>
+                  <a:srgbClr val="27303A"/>
                 </a:solidFill>
                 <a:latin typeface="DejaVu Sans"/>
                 <a:ea typeface="DejaVu Sans"/>
@@ -5609,7 +5609,7 @@
           <a:solidFill>
             <a:srgbClr val="FFFFFF"/>
           </a:solidFill>
-          <a:ln w="11112">
+          <a:ln w="15081">
             <a:solidFill>
               <a:srgbClr val="1F7F8C"/>
             </a:solidFill>
@@ -5755,9 +5755,9 @@
             <a:avLst/>
           </a:prstGeom>
           <a:noFill/>
-          <a:ln w="14604">
+          <a:ln w="19716">
             <a:solidFill>
-              <a:srgbClr val="1F2937"/>
+              <a:srgbClr val="111A24"/>
             </a:solidFill>
           </a:ln>
           <a:effectLst/>
@@ -5799,9 +5799,9 @@
             <a:avLst/>
           </a:prstGeom>
           <a:noFill/>
-          <a:ln w="14604">
+          <a:ln w="19716">
             <a:solidFill>
-              <a:srgbClr val="1F2937"/>
+              <a:srgbClr val="111A24"/>
             </a:solidFill>
           </a:ln>
           <a:effectLst/>
@@ -5843,9 +5843,9 @@
             <a:avLst/>
           </a:prstGeom>
           <a:noFill/>
-          <a:ln w="14604">
+          <a:ln w="19716">
             <a:solidFill>
-              <a:srgbClr val="1F2937"/>
+              <a:srgbClr val="111A24"/>
             </a:solidFill>
           </a:ln>
           <a:effectLst/>
@@ -5886,9 +5886,9 @@
           <a:prstGeom prst="line">
             <a:avLst/>
           </a:prstGeom>
-          <a:ln w="14604">
+          <a:ln w="19716">
             <a:solidFill>
-              <a:srgbClr val="1F2937"/>
+              <a:srgbClr val="111A24"/>
             </a:solidFill>
           </a:ln>
           <a:effectLst/>
@@ -5922,9 +5922,9 @@
           <a:prstGeom prst="line">
             <a:avLst/>
           </a:prstGeom>
-          <a:ln w="14604">
+          <a:ln w="19716">
             <a:solidFill>
-              <a:srgbClr val="1F2937"/>
+              <a:srgbClr val="111A24"/>
             </a:solidFill>
           </a:ln>
           <a:effectLst/>
@@ -6014,9 +6014,9 @@
           <a:prstGeom prst="line">
             <a:avLst/>
           </a:prstGeom>
-          <a:ln w="9524">
+          <a:ln w="12699">
             <a:solidFill>
-              <a:srgbClr val="E3E8ED"/>
+              <a:srgbClr val="CBD5DE"/>
             </a:solidFill>
           </a:ln>
           <a:effectLst/>
@@ -6053,11 +6053,11 @@
             </a:avLst>
           </a:prstGeom>
           <a:solidFill>
-            <a:srgbClr val="F7F9FB"/>
+            <a:srgbClr val="F4F7FA"/>
           </a:solidFill>
-          <a:ln w="9524">
+          <a:ln w="12699">
             <a:solidFill>
-              <a:srgbClr val="CBD3DA"/>
+              <a:srgbClr val="AEBBC7"/>
             </a:solidFill>
           </a:ln>
           <a:effectLst/>
@@ -6117,9 +6117,9 @@
               <a:spcAft>
                 <a:spcPts val="0"/>
               </a:spcAft>
-              <a:defRPr sz="1249" b="0" i="0" lang="zh-CN" dirty="0">
+              <a:defRPr sz="1249" b="1" i="0" lang="zh-CN" dirty="0">
                 <a:solidFill>
-                  <a:srgbClr val="3F4854"/>
+                  <a:srgbClr val="27303A"/>
                 </a:solidFill>
                 <a:latin typeface="DejaVu Sans"/>
                 <a:ea typeface="DejaVu Sans"/>
@@ -6127,9 +6127,9 @@
               </a:defRPr>
             </a:pPr>
             <a:r>
-              <a:rPr sz="1249" b="0" i="0" lang="zh-CN" dirty="0">
+              <a:rPr sz="1249" b="1" i="0" lang="zh-CN" dirty="0">
                 <a:solidFill>
-                  <a:srgbClr val="3F4854"/>
+                  <a:srgbClr val="27303A"/>
                 </a:solidFill>
                 <a:latin typeface="DejaVu Sans"/>
                 <a:ea typeface="DejaVu Sans"/>
@@ -6159,7 +6159,7 @@
           <a:solidFill>
             <a:srgbClr val="FFFAF0"/>
           </a:solidFill>
-          <a:ln w="11112">
+          <a:ln w="15081">
             <a:solidFill>
               <a:srgbClr val="C48A24"/>
             </a:solidFill>
@@ -6304,9 +6304,9 @@
           <a:prstGeom prst="line">
             <a:avLst/>
           </a:prstGeom>
-          <a:ln w="14604">
+          <a:ln w="19716">
             <a:solidFill>
-              <a:srgbClr val="1F2937"/>
+              <a:srgbClr val="111A24"/>
             </a:solidFill>
           </a:ln>
           <a:effectLst/>
@@ -6340,9 +6340,9 @@
           <a:prstGeom prst="line">
             <a:avLst/>
           </a:prstGeom>
-          <a:ln w="14604">
+          <a:ln w="19716">
             <a:solidFill>
-              <a:srgbClr val="1F2937"/>
+              <a:srgbClr val="111A24"/>
             </a:solidFill>
           </a:ln>
           <a:effectLst/>
@@ -6376,9 +6376,9 @@
           <a:prstGeom prst="line">
             <a:avLst/>
           </a:prstGeom>
-          <a:ln w="14604">
+          <a:ln w="19716">
             <a:solidFill>
-              <a:srgbClr val="1F2937"/>
+              <a:srgbClr val="111A24"/>
             </a:solidFill>
           </a:ln>
           <a:effectLst/>
@@ -6412,9 +6412,9 @@
           <a:prstGeom prst="line">
             <a:avLst/>
           </a:prstGeom>
-          <a:ln w="14604">
+          <a:ln w="19716">
             <a:solidFill>
-              <a:srgbClr val="1F2937"/>
+              <a:srgbClr val="111A24"/>
             </a:solidFill>
           </a:ln>
           <a:effectLst/>
@@ -6448,9 +6448,9 @@
           <a:prstGeom prst="line">
             <a:avLst/>
           </a:prstGeom>
-          <a:ln w="14604">
+          <a:ln w="19716">
             <a:solidFill>
-              <a:srgbClr val="1F2937"/>
+              <a:srgbClr val="111A24"/>
             </a:solidFill>
           </a:ln>
           <a:effectLst/>
@@ -6484,9 +6484,9 @@
           <a:prstGeom prst="line">
             <a:avLst/>
           </a:prstGeom>
-          <a:ln w="14604">
+          <a:ln w="19716">
             <a:solidFill>
-              <a:srgbClr val="1F2937"/>
+              <a:srgbClr val="111A24"/>
             </a:solidFill>
           </a:ln>
           <a:effectLst/>
@@ -6520,9 +6520,9 @@
           <a:prstGeom prst="line">
             <a:avLst/>
           </a:prstGeom>
-          <a:ln w="14604">
+          <a:ln w="19716">
             <a:solidFill>
-              <a:srgbClr val="1F2937"/>
+              <a:srgbClr val="111A24"/>
             </a:solidFill>
           </a:ln>
           <a:effectLst/>
@@ -6556,9 +6556,9 @@
           <a:prstGeom prst="line">
             <a:avLst/>
           </a:prstGeom>
-          <a:ln w="14604">
+          <a:ln w="19716">
             <a:solidFill>
-              <a:srgbClr val="1F2937"/>
+              <a:srgbClr val="111A24"/>
             </a:solidFill>
           </a:ln>
           <a:effectLst/>
@@ -6592,9 +6592,9 @@
           <a:prstGeom prst="line">
             <a:avLst/>
           </a:prstGeom>
-          <a:ln w="14604">
+          <a:ln w="19716">
             <a:solidFill>
-              <a:srgbClr val="1F2937"/>
+              <a:srgbClr val="111A24"/>
             </a:solidFill>
           </a:ln>
           <a:effectLst/>
@@ -6684,9 +6684,9 @@
           <a:prstGeom prst="line">
             <a:avLst/>
           </a:prstGeom>
-          <a:ln w="9524">
+          <a:ln w="12699">
             <a:solidFill>
-              <a:srgbClr val="E3E8ED"/>
+              <a:srgbClr val="CBD5DE"/>
             </a:solidFill>
           </a:ln>
           <a:effectLst/>
@@ -6723,11 +6723,11 @@
             </a:avLst>
           </a:prstGeom>
           <a:solidFill>
-            <a:srgbClr val="F7F9FB"/>
+            <a:srgbClr val="F4F7FA"/>
           </a:solidFill>
-          <a:ln w="9524">
+          <a:ln w="12699">
             <a:solidFill>
-              <a:srgbClr val="CBD3DA"/>
+              <a:srgbClr val="AEBBC7"/>
             </a:solidFill>
           </a:ln>
           <a:effectLst/>
@@ -6787,9 +6787,9 @@
               <a:spcAft>
                 <a:spcPts val="0"/>
               </a:spcAft>
-              <a:defRPr sz="1249" b="0" i="0" lang="zh-CN" dirty="0">
+              <a:defRPr sz="1249" b="1" i="0" lang="zh-CN" dirty="0">
                 <a:solidFill>
-                  <a:srgbClr val="3F4854"/>
+                  <a:srgbClr val="27303A"/>
                 </a:solidFill>
                 <a:latin typeface="DejaVu Sans"/>
                 <a:ea typeface="DejaVu Sans"/>
@@ -6797,9 +6797,9 @@
               </a:defRPr>
             </a:pPr>
             <a:r>
-              <a:rPr sz="1249" b="0" i="0" lang="zh-CN" dirty="0">
+              <a:rPr sz="1249" b="1" i="0" lang="zh-CN" dirty="0">
                 <a:solidFill>
-                  <a:srgbClr val="3F4854"/>
+                  <a:srgbClr val="27303A"/>
                 </a:solidFill>
                 <a:latin typeface="DejaVu Sans"/>
                 <a:ea typeface="DejaVu Sans"/>
@@ -6829,7 +6829,7 @@
           <a:solidFill>
             <a:srgbClr val="FFFFFF"/>
           </a:solidFill>
-          <a:ln w="11112">
+          <a:ln w="15081">
             <a:solidFill>
               <a:srgbClr val="1F7F8C"/>
             </a:solidFill>
@@ -6975,9 +6975,9 @@
             <a:avLst/>
           </a:prstGeom>
           <a:noFill/>
-          <a:ln w="14604">
+          <a:ln w="19716">
             <a:solidFill>
-              <a:srgbClr val="1F2937"/>
+              <a:srgbClr val="111A24"/>
             </a:solidFill>
           </a:ln>
           <a:effectLst/>
@@ -7018,9 +7018,9 @@
           <a:prstGeom prst="line">
             <a:avLst/>
           </a:prstGeom>
-          <a:ln w="14604">
+          <a:ln w="19716">
             <a:solidFill>
-              <a:srgbClr val="1F2937"/>
+              <a:srgbClr val="111A24"/>
             </a:solidFill>
           </a:ln>
           <a:effectLst/>
@@ -7054,9 +7054,9 @@
           <a:prstGeom prst="line">
             <a:avLst/>
           </a:prstGeom>
-          <a:ln w="14604">
+          <a:ln w="19716">
             <a:solidFill>
-              <a:srgbClr val="1F2937"/>
+              <a:srgbClr val="111A24"/>
             </a:solidFill>
           </a:ln>
           <a:effectLst/>
@@ -7090,9 +7090,9 @@
           <a:prstGeom prst="line">
             <a:avLst/>
           </a:prstGeom>
-          <a:ln w="14604">
+          <a:ln w="19716">
             <a:solidFill>
-              <a:srgbClr val="1F2937"/>
+              <a:srgbClr val="111A24"/>
             </a:solidFill>
           </a:ln>
           <a:effectLst/>
@@ -7127,9 +7127,9 @@
             <a:avLst/>
           </a:prstGeom>
           <a:noFill/>
-          <a:ln w="14604">
+          <a:ln w="19716">
             <a:solidFill>
-              <a:srgbClr val="1F2937"/>
+              <a:srgbClr val="111A24"/>
             </a:solidFill>
           </a:ln>
           <a:effectLst/>
@@ -7170,9 +7170,9 @@
           <a:prstGeom prst="line">
             <a:avLst/>
           </a:prstGeom>
-          <a:ln w="14604">
+          <a:ln w="19716">
             <a:solidFill>
-              <a:srgbClr val="1F2937"/>
+              <a:srgbClr val="111A24"/>
             </a:solidFill>
           </a:ln>
           <a:effectLst/>
@@ -7206,9 +7206,9 @@
           <a:prstGeom prst="line">
             <a:avLst/>
           </a:prstGeom>
-          <a:ln w="14604">
+          <a:ln w="19716">
             <a:solidFill>
-              <a:srgbClr val="1F2937"/>
+              <a:srgbClr val="111A24"/>
             </a:solidFill>
           </a:ln>
           <a:effectLst/>
@@ -7242,9 +7242,9 @@
           <a:prstGeom prst="line">
             <a:avLst/>
           </a:prstGeom>
-          <a:ln w="14604">
+          <a:ln w="19716">
             <a:solidFill>
-              <a:srgbClr val="1F2937"/>
+              <a:srgbClr val="111A24"/>
             </a:solidFill>
           </a:ln>
           <a:effectLst/>
@@ -7279,9 +7279,9 @@
             <a:avLst/>
           </a:prstGeom>
           <a:noFill/>
-          <a:ln w="14604">
+          <a:ln w="19716">
             <a:solidFill>
-              <a:srgbClr val="1F2937"/>
+              <a:srgbClr val="111A24"/>
             </a:solidFill>
           </a:ln>
           <a:effectLst/>
@@ -7322,9 +7322,9 @@
           <a:prstGeom prst="line">
             <a:avLst/>
           </a:prstGeom>
-          <a:ln w="14604">
+          <a:ln w="19716">
             <a:solidFill>
-              <a:srgbClr val="1F2937"/>
+              <a:srgbClr val="111A24"/>
             </a:solidFill>
           </a:ln>
           <a:effectLst/>
@@ -7414,9 +7414,9 @@
           <a:prstGeom prst="line">
             <a:avLst/>
           </a:prstGeom>
-          <a:ln w="9524">
+          <a:ln w="12699">
             <a:solidFill>
-              <a:srgbClr val="E3E8ED"/>
+              <a:srgbClr val="CBD5DE"/>
             </a:solidFill>
           </a:ln>
           <a:effectLst/>
@@ -7453,11 +7453,11 @@
             </a:avLst>
           </a:prstGeom>
           <a:solidFill>
-            <a:srgbClr val="F7F9FB"/>
+            <a:srgbClr val="F4F7FA"/>
           </a:solidFill>
-          <a:ln w="9524">
+          <a:ln w="12699">
             <a:solidFill>
-              <a:srgbClr val="CBD3DA"/>
+              <a:srgbClr val="AEBBC7"/>
             </a:solidFill>
           </a:ln>
           <a:effectLst/>
@@ -7494,6 +7494,184 @@
           <a:xfrm>
             <a:off x="8770937" y="6111874"/>
             <a:ext cx="2857499" cy="222249"/>
+          </a:xfrm>
+          <a:prstGeom prst="rect">
+            <a:avLst/>
+          </a:prstGeom>
+          <a:noFill/>
+          <a:effectLst/>
+        </p:spPr>
+        <p:txBody>
+          <a:bodyPr wrap="none" anchor="ctr" tIns="0" rIns="0" bIns="0" lIns="0" anchorCtr="0" vertOverflow="overflow">
+            <a:noAutofit/>
+          </a:bodyPr>
+          <a:lstStyle/>
+          <a:p>
+            <a:pPr algn="ctr" fontAlgn="base">
+              <a:lnSpc>
+                <a:spcPts val="1046"/>
+              </a:lnSpc>
+              <a:spcBef>
+                <a:spcPts val="0"/>
+              </a:spcBef>
+              <a:spcAft>
+                <a:spcPts val="0"/>
+              </a:spcAft>
+              <a:defRPr sz="891" b="1" i="0" lang="zh-CN" dirty="0">
+                <a:solidFill>
+                  <a:srgbClr val="27303A"/>
+                </a:solidFill>
+                <a:latin typeface="DejaVu Sans"/>
+                <a:ea typeface="DejaVu Sans"/>
+                <a:cs typeface="DejaVu Sans"/>
+              </a:defRPr>
+            </a:pPr>
+            <a:r>
+              <a:rPr sz="891" b="1" i="0" lang="zh-CN" dirty="0">
+                <a:solidFill>
+                  <a:srgbClr val="27303A"/>
+                </a:solidFill>
+                <a:latin typeface="DejaVu Sans"/>
+                <a:ea typeface="DejaVu Sans"/>
+                <a:cs typeface="DejaVu Sans"/>
+              </a:rPr>
+              <a:t>Phase diagram · structure · thermodynamics</a:t>
+            </a:r>
+          </a:p>
+        </p:txBody>
+      </p:sp>
+      <p:sp>
+        <p:nvSpPr>
+          <p:cNvPr id="95" name="e0_0" descr="Editable line; source id e0_0"/>
+          <p:cNvSpPr/>
+          <p:nvPr/>
+        </p:nvSpPr>
+        <p:spPr>
+          <a:xfrm>
+            <a:off x="3952875" y="1944687"/>
+            <a:ext cx="508000" cy="95250"/>
+          </a:xfrm>
+          <a:custGeom>
+            <a:avLst/>
+            <a:gdLst/>
+            <a:ahLst/>
+            <a:cxnLst/>
+            <a:rect l="l" t="t" r="r" b="b"/>
+            <a:pathLst>
+              <a:path w="64000" h="12000">
+                <a:moveTo>
+                  <a:pt x="0" y="4750"/>
+                </a:moveTo>
+                <a:lnTo>
+                  <a:pt x="49000" y="4750"/>
+                </a:lnTo>
+                <a:lnTo>
+                  <a:pt x="49000" y="0"/>
+                </a:lnTo>
+                <a:lnTo>
+                  <a:pt x="64000" y="6000"/>
+                </a:lnTo>
+                <a:lnTo>
+                  <a:pt x="49000" y="12000"/>
+                </a:lnTo>
+                <a:lnTo>
+                  <a:pt x="49000" y="7250"/>
+                </a:lnTo>
+                <a:lnTo>
+                  <a:pt x="0" y="7250"/>
+                </a:lnTo>
+                <a:close/>
+              </a:path>
+            </a:pathLst>
+          </a:custGeom>
+          <a:solidFill>
+            <a:srgbClr val="3C4753"/>
+          </a:solidFill>
+          <a:ln>
+            <a:noFill/>
+          </a:ln>
+          <a:effectLst/>
+        </p:spPr>
+        <p:style>
+          <a:lnRef idx="1">
+            <a:schemeClr val="accent1"/>
+          </a:lnRef>
+          <a:fillRef idx="3">
+            <a:schemeClr val="accent1"/>
+          </a:fillRef>
+          <a:effectRef idx="0">
+            <a:schemeClr val="accent1"/>
+          </a:effectRef>
+          <a:fontRef idx="minor">
+            <a:schemeClr val="lt1"/>
+          </a:fontRef>
+        </p:style>
+        <p:txBody>
+          <a:bodyPr rtlCol="0" anchor="ctr"/>
+          <a:lstStyle/>
+          <a:p>
+            <a:pPr algn="ctr"/>
+          </a:p>
+        </p:txBody>
+      </p:sp>
+      <p:sp>
+        <p:nvSpPr>
+          <p:cNvPr id="96" name="e0_p" descr="Editable shape; source id e0_p"/>
+          <p:cNvSpPr/>
+          <p:nvPr/>
+        </p:nvSpPr>
+        <p:spPr>
+          <a:xfrm>
+            <a:off x="3222624" y="460374"/>
+            <a:ext cx="1976437" cy="309562"/>
+          </a:xfrm>
+          <a:prstGeom prst="roundRect">
+            <a:avLst>
+              <a:gd name="adj" fmla="val 50000"/>
+            </a:avLst>
+          </a:prstGeom>
+          <a:solidFill>
+            <a:srgbClr val="FFFFFF"/>
+          </a:solidFill>
+          <a:ln w="12699">
+            <a:solidFill>
+              <a:srgbClr val="CBD3DA"/>
+            </a:solidFill>
+          </a:ln>
+          <a:effectLst/>
+        </p:spPr>
+        <p:style>
+          <a:lnRef idx="1">
+            <a:schemeClr val="accent1"/>
+          </a:lnRef>
+          <a:fillRef idx="3">
+            <a:schemeClr val="accent1"/>
+          </a:fillRef>
+          <a:effectRef idx="0">
+            <a:schemeClr val="accent1"/>
+          </a:effectRef>
+          <a:fontRef idx="minor">
+            <a:schemeClr val="lt1"/>
+          </a:fontRef>
+        </p:style>
+        <p:txBody>
+          <a:bodyPr rtlCol="0" anchor="ctr"/>
+          <a:lstStyle/>
+          <a:p>
+            <a:pPr algn="ctr"/>
+          </a:p>
+        </p:txBody>
+      </p:sp>
+      <p:sp>
+        <p:nvSpPr>
+          <p:cNvPr id="97" name="e0_p_t" descr="Editable text; source id e0_p_t"/>
+          <p:cNvSpPr txBox="1"/>
+          <p:nvPr/>
+        </p:nvSpPr>
+        <p:spPr>
+          <a:xfrm>
+            <a:off x="3301999" y="492124"/>
+            <a:ext cx="1817687" cy="246062"/>
           </a:xfrm>
           <a:prstGeom prst="rect">
             <a:avLst/>
@@ -7517,9 +7695,9 @@
               <a:spcAft>
                 <a:spcPts val="0"/>
               </a:spcAft>
-              <a:defRPr sz="1006" b="0" i="0" lang="zh-CN" dirty="0">
+              <a:defRPr sz="999" b="1" i="0" lang="zh-CN" dirty="0">
                 <a:solidFill>
-                  <a:srgbClr val="3F4854"/>
+                  <a:srgbClr val="27303A"/>
                 </a:solidFill>
                 <a:latin typeface="DejaVu Sans"/>
                 <a:ea typeface="DejaVu Sans"/>
@@ -7527,29 +7705,29 @@
               </a:defRPr>
             </a:pPr>
             <a:r>
-              <a:rPr sz="1006" b="0" i="0" lang="zh-CN" dirty="0">
+              <a:rPr sz="999" b="1" i="0" lang="zh-CN" dirty="0">
                 <a:solidFill>
-                  <a:srgbClr val="3F4854"/>
+                  <a:srgbClr val="27303A"/>
                 </a:solidFill>
                 <a:latin typeface="DejaVu Sans"/>
                 <a:ea typeface="DejaVu Sans"/>
                 <a:cs typeface="DejaVu Sans"/>
               </a:rPr>
-              <a:t>Phase diagram · structure · thermodynamics</a:t>
-            </a:r>
-          </a:p>
-        </p:txBody>
-      </p:sp>
-      <p:sp>
-        <p:nvSpPr>
-          <p:cNvPr id="95" name="e0_0" descr="Editable line; source id e0_0"/>
+              <a:t>Structural constraints</a:t>
+            </a:r>
+          </a:p>
+        </p:txBody>
+      </p:sp>
+      <p:sp>
+        <p:nvSpPr>
+          <p:cNvPr id="98" name="e1_0" descr="Editable line; source id e1_0"/>
           <p:cNvSpPr/>
           <p:nvPr/>
         </p:nvSpPr>
         <p:spPr>
           <a:xfrm>
-            <a:off x="3952875" y="1952625"/>
-            <a:ext cx="508000" cy="79375"/>
+            <a:off x="7921625" y="1944687"/>
+            <a:ext cx="508000" cy="95250"/>
           </a:xfrm>
           <a:custGeom>
             <a:avLst/>
@@ -7558,34 +7736,34 @@
             <a:cxnLst/>
             <a:rect l="l" t="t" r="r" b="b"/>
             <a:pathLst>
-              <a:path w="64000" h="10000">
+              <a:path w="64000" h="12000">
                 <a:moveTo>
-                  <a:pt x="0" y="4100"/>
+                  <a:pt x="0" y="4750"/>
                 </a:moveTo>
                 <a:lnTo>
-                  <a:pt x="52000" y="4100"/>
+                  <a:pt x="49000" y="4750"/>
                 </a:lnTo>
                 <a:lnTo>
-                  <a:pt x="52000" y="0"/>
+                  <a:pt x="49000" y="0"/>
                 </a:lnTo>
                 <a:lnTo>
-                  <a:pt x="64000" y="5000"/>
+                  <a:pt x="64000" y="6000"/>
                 </a:lnTo>
                 <a:lnTo>
-                  <a:pt x="52000" y="10000"/>
+                  <a:pt x="49000" y="12000"/>
                 </a:lnTo>
                 <a:lnTo>
-                  <a:pt x="52000" y="5900"/>
+                  <a:pt x="49000" y="7250"/>
                 </a:lnTo>
                 <a:lnTo>
-                  <a:pt x="0" y="5900"/>
+                  <a:pt x="0" y="7250"/>
                 </a:lnTo>
                 <a:close/>
               </a:path>
             </a:pathLst>
           </a:custGeom>
           <a:solidFill>
-            <a:srgbClr val="4B5563"/>
+            <a:srgbClr val="3C4753"/>
           </a:solidFill>
           <a:ln>
             <a:noFill/>
@@ -7616,14 +7794,14 @@
       </p:sp>
       <p:sp>
         <p:nvSpPr>
-          <p:cNvPr id="96" name="e0_p" descr="Editable shape; source id e0_p"/>
+          <p:cNvPr id="99" name="e1_p" descr="Editable shape; source id e1_p"/>
           <p:cNvSpPr/>
           <p:nvPr/>
         </p:nvSpPr>
         <p:spPr>
           <a:xfrm>
-            <a:off x="3222624" y="1523999"/>
-            <a:ext cx="1976437" cy="309562"/>
+            <a:off x="7429499" y="460374"/>
+            <a:ext cx="1500187" cy="309562"/>
           </a:xfrm>
           <a:prstGeom prst="roundRect">
             <a:avLst>
@@ -7633,7 +7811,7 @@
           <a:solidFill>
             <a:srgbClr val="FFFFFF"/>
           </a:solidFill>
-          <a:ln w="8731">
+          <a:ln w="12699">
             <a:solidFill>
               <a:srgbClr val="CBD3DA"/>
             </a:solidFill>
@@ -7664,14 +7842,14 @@
       </p:sp>
       <p:sp>
         <p:nvSpPr>
-          <p:cNvPr id="97" name="e0_p_t" descr="Editable text; source id e0_p_t"/>
+          <p:cNvPr id="100" name="e1_p_t" descr="Editable text; source id e1_p_t"/>
           <p:cNvSpPr txBox="1"/>
           <p:nvPr/>
         </p:nvSpPr>
         <p:spPr>
           <a:xfrm>
-            <a:off x="3301999" y="1555749"/>
-            <a:ext cx="1817687" cy="246062"/>
+            <a:off x="7508874" y="492124"/>
+            <a:ext cx="1341437" cy="246062"/>
           </a:xfrm>
           <a:prstGeom prst="rect">
             <a:avLst/>
@@ -7695,9 +7873,9 @@
               <a:spcAft>
                 <a:spcPts val="0"/>
               </a:spcAft>
-              <a:defRPr sz="999" b="0" i="0" lang="zh-CN" dirty="0">
+              <a:defRPr sz="999" b="1" i="0" lang="zh-CN" dirty="0">
                 <a:solidFill>
-                  <a:srgbClr val="3F4854"/>
+                  <a:srgbClr val="27303A"/>
                 </a:solidFill>
                 <a:latin typeface="DejaVu Sans"/>
                 <a:ea typeface="DejaVu Sans"/>
@@ -7705,29 +7883,29 @@
               </a:defRPr>
             </a:pPr>
             <a:r>
-              <a:rPr sz="999" b="0" i="0" lang="zh-CN" dirty="0">
+              <a:rPr sz="999" b="1" i="0" lang="zh-CN" dirty="0">
                 <a:solidFill>
-                  <a:srgbClr val="3F4854"/>
+                  <a:srgbClr val="27303A"/>
                 </a:solidFill>
                 <a:latin typeface="DejaVu Sans"/>
                 <a:ea typeface="DejaVu Sans"/>
                 <a:cs typeface="DejaVu Sans"/>
               </a:rPr>
-              <a:t>Structural constraints</a:t>
-            </a:r>
-          </a:p>
-        </p:txBody>
-      </p:sp>
-      <p:sp>
-        <p:nvSpPr>
-          <p:cNvPr id="98" name="e1_0" descr="Editable line; source id e1_0"/>
+              <a:t>Condition window</a:t>
+            </a:r>
+          </a:p>
+        </p:txBody>
+      </p:sp>
+      <p:sp>
+        <p:nvSpPr>
+          <p:cNvPr id="101" name="e3_0" descr="Editable line; source id e3_0"/>
           <p:cNvSpPr/>
           <p:nvPr/>
         </p:nvSpPr>
         <p:spPr>
           <a:xfrm>
-            <a:off x="7921625" y="1952625"/>
-            <a:ext cx="508000" cy="79375"/>
+            <a:off x="3952875" y="5357812"/>
+            <a:ext cx="508000" cy="95250"/>
           </a:xfrm>
           <a:custGeom>
             <a:avLst/>
@@ -7736,34 +7914,34 @@
             <a:cxnLst/>
             <a:rect l="l" t="t" r="r" b="b"/>
             <a:pathLst>
-              <a:path w="64000" h="10000">
+              <a:path w="64000" h="12000">
                 <a:moveTo>
-                  <a:pt x="0" y="4100"/>
+                  <a:pt x="0" y="4750"/>
                 </a:moveTo>
                 <a:lnTo>
-                  <a:pt x="52000" y="4100"/>
+                  <a:pt x="49000" y="4750"/>
                 </a:lnTo>
                 <a:lnTo>
-                  <a:pt x="52000" y="0"/>
+                  <a:pt x="49000" y="0"/>
                 </a:lnTo>
                 <a:lnTo>
-                  <a:pt x="64000" y="5000"/>
+                  <a:pt x="64000" y="6000"/>
                 </a:lnTo>
                 <a:lnTo>
-                  <a:pt x="52000" y="10000"/>
+                  <a:pt x="49000" y="12000"/>
                 </a:lnTo>
                 <a:lnTo>
-                  <a:pt x="52000" y="5900"/>
+                  <a:pt x="49000" y="7250"/>
                 </a:lnTo>
                 <a:lnTo>
-                  <a:pt x="0" y="5900"/>
+                  <a:pt x="0" y="7250"/>
                 </a:lnTo>
                 <a:close/>
               </a:path>
             </a:pathLst>
           </a:custGeom>
           <a:solidFill>
-            <a:srgbClr val="4B5563"/>
+            <a:srgbClr val="3C4753"/>
           </a:solidFill>
           <a:ln>
             <a:noFill/>
@@ -7794,14 +7972,14 @@
       </p:sp>
       <p:sp>
         <p:nvSpPr>
-          <p:cNvPr id="99" name="e1_p" descr="Editable shape; source id e1_p"/>
+          <p:cNvPr id="102" name="e3_p" descr="Editable shape; source id e3_p"/>
           <p:cNvSpPr/>
           <p:nvPr/>
         </p:nvSpPr>
         <p:spPr>
           <a:xfrm>
-            <a:off x="7429499" y="1523999"/>
-            <a:ext cx="1500187" cy="309562"/>
+            <a:off x="3333749" y="3873499"/>
+            <a:ext cx="1738312" cy="309562"/>
           </a:xfrm>
           <a:prstGeom prst="roundRect">
             <a:avLst>
@@ -7811,7 +7989,7 @@
           <a:solidFill>
             <a:srgbClr val="FFFFFF"/>
           </a:solidFill>
-          <a:ln w="8731">
+          <a:ln w="12699">
             <a:solidFill>
               <a:srgbClr val="CBD3DA"/>
             </a:solidFill>
@@ -7842,14 +8020,14 @@
       </p:sp>
       <p:sp>
         <p:nvSpPr>
-          <p:cNvPr id="100" name="e1_p_t" descr="Editable text; source id e1_p_t"/>
+          <p:cNvPr id="103" name="e3_p_t" descr="Editable text; source id e3_p_t"/>
           <p:cNvSpPr txBox="1"/>
           <p:nvPr/>
         </p:nvSpPr>
         <p:spPr>
           <a:xfrm>
-            <a:off x="7508874" y="1555749"/>
-            <a:ext cx="1341437" cy="246062"/>
+            <a:off x="3413124" y="3905249"/>
+            <a:ext cx="1579562" cy="246062"/>
           </a:xfrm>
           <a:prstGeom prst="rect">
             <a:avLst/>
@@ -7873,9 +8051,9 @@
               <a:spcAft>
                 <a:spcPts val="0"/>
               </a:spcAft>
-              <a:defRPr sz="999" b="0" i="0" lang="zh-CN" dirty="0">
+              <a:defRPr sz="999" b="1" i="0" lang="zh-CN" dirty="0">
                 <a:solidFill>
-                  <a:srgbClr val="3F4854"/>
+                  <a:srgbClr val="27303A"/>
                 </a:solidFill>
                 <a:latin typeface="DejaVu Sans"/>
                 <a:ea typeface="DejaVu Sans"/>
@@ -7883,29 +8061,29 @@
               </a:defRPr>
             </a:pPr>
             <a:r>
-              <a:rPr sz="999" b="0" i="0" lang="zh-CN" dirty="0">
+              <a:rPr sz="999" b="1" i="0" lang="zh-CN" dirty="0">
                 <a:solidFill>
-                  <a:srgbClr val="3F4854"/>
+                  <a:srgbClr val="27303A"/>
                 </a:solidFill>
                 <a:latin typeface="DejaVu Sans"/>
                 <a:ea typeface="DejaVu Sans"/>
                 <a:cs typeface="DejaVu Sans"/>
               </a:rPr>
-              <a:t>Condition window</a:t>
-            </a:r>
-          </a:p>
-        </p:txBody>
-      </p:sp>
-      <p:sp>
-        <p:nvSpPr>
-          <p:cNvPr id="101" name="e3_0" descr="Editable line; source id e3_0"/>
+              <a:t>Comparison boundary</a:t>
+            </a:r>
+          </a:p>
+        </p:txBody>
+      </p:sp>
+      <p:sp>
+        <p:nvSpPr>
+          <p:cNvPr id="104" name="e4_0" descr="Editable line; source id e4_0"/>
           <p:cNvSpPr/>
           <p:nvPr/>
         </p:nvSpPr>
         <p:spPr>
           <a:xfrm>
-            <a:off x="3952875" y="5365750"/>
-            <a:ext cx="508000" cy="79375"/>
+            <a:off x="7921625" y="5357812"/>
+            <a:ext cx="508000" cy="95250"/>
           </a:xfrm>
           <a:custGeom>
             <a:avLst/>
@@ -7914,34 +8092,34 @@
             <a:cxnLst/>
             <a:rect l="l" t="t" r="r" b="b"/>
             <a:pathLst>
-              <a:path w="64000" h="10000">
+              <a:path w="64000" h="12000">
                 <a:moveTo>
-                  <a:pt x="0" y="4100"/>
+                  <a:pt x="0" y="4750"/>
                 </a:moveTo>
                 <a:lnTo>
-                  <a:pt x="52000" y="4100"/>
+                  <a:pt x="49000" y="4750"/>
                 </a:lnTo>
                 <a:lnTo>
-                  <a:pt x="52000" y="0"/>
+                  <a:pt x="49000" y="0"/>
                 </a:lnTo>
                 <a:lnTo>
-                  <a:pt x="64000" y="5000"/>
+                  <a:pt x="64000" y="6000"/>
                 </a:lnTo>
                 <a:lnTo>
-                  <a:pt x="52000" y="10000"/>
+                  <a:pt x="49000" y="12000"/>
                 </a:lnTo>
                 <a:lnTo>
-                  <a:pt x="52000" y="5900"/>
+                  <a:pt x="49000" y="7250"/>
                 </a:lnTo>
                 <a:lnTo>
-                  <a:pt x="0" y="5900"/>
+                  <a:pt x="0" y="7250"/>
                 </a:lnTo>
                 <a:close/>
               </a:path>
             </a:pathLst>
           </a:custGeom>
           <a:solidFill>
-            <a:srgbClr val="4B5563"/>
+            <a:srgbClr val="3C4753"/>
           </a:solidFill>
           <a:ln>
             <a:noFill/>
@@ -7972,14 +8150,14 @@
       </p:sp>
       <p:sp>
         <p:nvSpPr>
-          <p:cNvPr id="102" name="e3_p" descr="Editable shape; source id e3_p"/>
+          <p:cNvPr id="105" name="e4_p" descr="Editable shape; source id e4_p"/>
           <p:cNvSpPr/>
           <p:nvPr/>
         </p:nvSpPr>
         <p:spPr>
           <a:xfrm>
-            <a:off x="3333749" y="4937124"/>
-            <a:ext cx="1738312" cy="309562"/>
+            <a:off x="7635874" y="3873499"/>
+            <a:ext cx="1071562" cy="309562"/>
           </a:xfrm>
           <a:prstGeom prst="roundRect">
             <a:avLst>
@@ -7989,7 +8167,7 @@
           <a:solidFill>
             <a:srgbClr val="FFFFFF"/>
           </a:solidFill>
-          <a:ln w="8731">
+          <a:ln w="12699">
             <a:solidFill>
               <a:srgbClr val="CBD3DA"/>
             </a:solidFill>
@@ -8020,14 +8198,14 @@
       </p:sp>
       <p:sp>
         <p:nvSpPr>
-          <p:cNvPr id="103" name="e3_p_t" descr="Editable text; source id e3_p_t"/>
+          <p:cNvPr id="106" name="e4_p_t" descr="Editable text; source id e4_p_t"/>
           <p:cNvSpPr txBox="1"/>
           <p:nvPr/>
         </p:nvSpPr>
         <p:spPr>
           <a:xfrm>
-            <a:off x="3413124" y="4968874"/>
-            <a:ext cx="1579562" cy="246062"/>
+            <a:off x="7715249" y="3905249"/>
+            <a:ext cx="912812" cy="246062"/>
           </a:xfrm>
           <a:prstGeom prst="rect">
             <a:avLst/>
@@ -8051,9 +8229,9 @@
               <a:spcAft>
                 <a:spcPts val="0"/>
               </a:spcAft>
-              <a:defRPr sz="999" b="0" i="0" lang="zh-CN" dirty="0">
+              <a:defRPr sz="999" b="1" i="0" lang="zh-CN" dirty="0">
                 <a:solidFill>
-                  <a:srgbClr val="3F4854"/>
+                  <a:srgbClr val="27303A"/>
                 </a:solidFill>
                 <a:latin typeface="DejaVu Sans"/>
                 <a:ea typeface="DejaVu Sans"/>
@@ -8061,29 +8239,101 @@
               </a:defRPr>
             </a:pPr>
             <a:r>
-              <a:rPr sz="999" b="0" i="0" lang="zh-CN" dirty="0">
+              <a:rPr sz="999" b="1" i="0" lang="zh-CN" dirty="0">
                 <a:solidFill>
-                  <a:srgbClr val="3F4854"/>
+                  <a:srgbClr val="27303A"/>
                 </a:solidFill>
                 <a:latin typeface="DejaVu Sans"/>
                 <a:ea typeface="DejaVu Sans"/>
                 <a:cs typeface="DejaVu Sans"/>
               </a:rPr>
-              <a:t>Comparison boundary</a:t>
-            </a:r>
-          </a:p>
-        </p:txBody>
-      </p:sp>
-      <p:sp>
-        <p:nvSpPr>
-          <p:cNvPr id="104" name="e4_0" descr="Editable line; source id e4_0"/>
+              <a:t>Gap-driven</a:t>
+            </a:r>
+          </a:p>
+        </p:txBody>
+      </p:sp>
+      <p:cxnSp>
+        <p:nvCxnSpPr>
+          <p:cNvPr id="107" name="e2_0" descr="Editable line; source id e2_0"/>
+          <p:cNvCxnSpPr/>
+          <p:nvPr/>
+        </p:nvCxnSpPr>
+        <p:spPr>
+          <a:xfrm>
+            <a:off x="10159999" y="3127374"/>
+            <a:ext cx="0" cy="412750"/>
+          </a:xfrm>
+          <a:prstGeom prst="line">
+            <a:avLst/>
+          </a:prstGeom>
+          <a:ln w="19843">
+            <a:solidFill>
+              <a:srgbClr val="3C4753"/>
+            </a:solidFill>
+          </a:ln>
+          <a:effectLst/>
+        </p:spPr>
+        <p:style>
+          <a:lnRef idx="2">
+            <a:schemeClr val="accent1"/>
+          </a:lnRef>
+          <a:fillRef idx="0">
+            <a:schemeClr val="accent1"/>
+          </a:fillRef>
+          <a:effectRef idx="0">
+            <a:schemeClr val="accent1"/>
+          </a:effectRef>
+          <a:fontRef idx="minor">
+            <a:schemeClr val="tx1"/>
+          </a:fontRef>
+        </p:style>
+      </p:cxnSp>
+      <p:cxnSp>
+        <p:nvCxnSpPr>
+          <p:cNvPr id="108" name="e2_1" descr="Editable line; source id e2_1"/>
+          <p:cNvCxnSpPr/>
+          <p:nvPr/>
+        </p:nvCxnSpPr>
+        <p:spPr>
+          <a:xfrm flipH="1">
+            <a:off x="2857499" y="3540124"/>
+            <a:ext cx="7302500" cy="0"/>
+          </a:xfrm>
+          <a:prstGeom prst="line">
+            <a:avLst/>
+          </a:prstGeom>
+          <a:ln w="19843">
+            <a:solidFill>
+              <a:srgbClr val="3C4753"/>
+            </a:solidFill>
+          </a:ln>
+          <a:effectLst/>
+        </p:spPr>
+        <p:style>
+          <a:lnRef idx="2">
+            <a:schemeClr val="accent1"/>
+          </a:lnRef>
+          <a:fillRef idx="0">
+            <a:schemeClr val="accent1"/>
+          </a:fillRef>
+          <a:effectRef idx="0">
+            <a:schemeClr val="accent1"/>
+          </a:effectRef>
+          <a:fontRef idx="minor">
+            <a:schemeClr val="tx1"/>
+          </a:fontRef>
+        </p:style>
+      </p:cxnSp>
+      <p:sp>
+        <p:nvSpPr>
+          <p:cNvPr id="109" name="e2_2" descr="Editable line; source id e2_2"/>
           <p:cNvSpPr/>
           <p:nvPr/>
         </p:nvSpPr>
         <p:spPr>
           <a:xfrm>
-            <a:off x="7921625" y="5365750"/>
-            <a:ext cx="508000" cy="79375"/>
+            <a:off x="2809875" y="3540125"/>
+            <a:ext cx="95250" cy="730250"/>
           </a:xfrm>
           <a:custGeom>
             <a:avLst/>
@@ -8092,34 +8342,34 @@
             <a:cxnLst/>
             <a:rect l="l" t="t" r="r" b="b"/>
             <a:pathLst>
-              <a:path w="64000" h="10000">
+              <a:path w="12000" h="92000">
                 <a:moveTo>
-                  <a:pt x="0" y="4100"/>
+                  <a:pt x="7250" y="0"/>
                 </a:moveTo>
                 <a:lnTo>
-                  <a:pt x="52000" y="4100"/>
+                  <a:pt x="7250" y="77000"/>
                 </a:lnTo>
                 <a:lnTo>
-                  <a:pt x="52000" y="0"/>
+                  <a:pt x="12000" y="77000"/>
                 </a:lnTo>
                 <a:lnTo>
-                  <a:pt x="64000" y="5000"/>
+                  <a:pt x="6000" y="92000"/>
                 </a:lnTo>
                 <a:lnTo>
-                  <a:pt x="52000" y="10000"/>
+                  <a:pt x="0" y="77000"/>
                 </a:lnTo>
                 <a:lnTo>
-                  <a:pt x="52000" y="5900"/>
+                  <a:pt x="4750" y="77000"/>
                 </a:lnTo>
                 <a:lnTo>
-                  <a:pt x="0" y="5900"/>
+                  <a:pt x="4750" y="0"/>
                 </a:lnTo>
                 <a:close/>
               </a:path>
             </a:pathLst>
           </a:custGeom>
           <a:solidFill>
-            <a:srgbClr val="4B5563"/>
+            <a:srgbClr val="3C4753"/>
           </a:solidFill>
           <a:ln>
             <a:noFill/>
@@ -8150,14 +8400,14 @@
       </p:sp>
       <p:sp>
         <p:nvSpPr>
-          <p:cNvPr id="105" name="e4_p" descr="Editable shape; source id e4_p"/>
+          <p:cNvPr id="110" name="e2_p" descr="Editable shape; source id e2_p"/>
           <p:cNvSpPr/>
           <p:nvPr/>
         </p:nvSpPr>
         <p:spPr>
           <a:xfrm>
-            <a:off x="7635874" y="4937124"/>
-            <a:ext cx="1071562" cy="309562"/>
+            <a:off x="5524499" y="3873499"/>
+            <a:ext cx="1976437" cy="309562"/>
           </a:xfrm>
           <a:prstGeom prst="roundRect">
             <a:avLst>
@@ -8167,7 +8417,7 @@
           <a:solidFill>
             <a:srgbClr val="FFFFFF"/>
           </a:solidFill>
-          <a:ln w="8731">
+          <a:ln w="12699">
             <a:solidFill>
               <a:srgbClr val="CBD3DA"/>
             </a:solidFill>
@@ -8198,14 +8448,14 @@
       </p:sp>
       <p:sp>
         <p:nvSpPr>
-          <p:cNvPr id="106" name="e4_p_t" descr="Editable text; source id e4_p_t"/>
+          <p:cNvPr id="111" name="e2_p_t" descr="Editable text; source id e2_p_t"/>
           <p:cNvSpPr txBox="1"/>
           <p:nvPr/>
         </p:nvSpPr>
         <p:spPr>
           <a:xfrm>
-            <a:off x="7715249" y="4968874"/>
-            <a:ext cx="912812" cy="246062"/>
+            <a:off x="5603874" y="3905249"/>
+            <a:ext cx="1817687" cy="246062"/>
           </a:xfrm>
           <a:prstGeom prst="rect">
             <a:avLst/>
@@ -8229,9 +8479,9 @@
               <a:spcAft>
                 <a:spcPts val="0"/>
               </a:spcAft>
-              <a:defRPr sz="999" b="0" i="0" lang="zh-CN" dirty="0">
+              <a:defRPr sz="999" b="1" i="0" lang="zh-CN" dirty="0">
                 <a:solidFill>
-                  <a:srgbClr val="3F4854"/>
+                  <a:srgbClr val="27303A"/>
                 </a:solidFill>
                 <a:latin typeface="DejaVu Sans"/>
                 <a:ea typeface="DejaVu Sans"/>
@@ -8239,259 +8489,9 @@
               </a:defRPr>
             </a:pPr>
             <a:r>
-              <a:rPr sz="999" b="0" i="0" lang="zh-CN" dirty="0">
+              <a:rPr sz="999" b="1" i="0" lang="zh-CN" dirty="0">
                 <a:solidFill>
-                  <a:srgbClr val="3F4854"/>
-                </a:solidFill>
-                <a:latin typeface="DejaVu Sans"/>
-                <a:ea typeface="DejaVu Sans"/>
-                <a:cs typeface="DejaVu Sans"/>
-              </a:rPr>
-              <a:t>Gap-driven</a:t>
-            </a:r>
-          </a:p>
-        </p:txBody>
-      </p:sp>
-      <p:cxnSp>
-        <p:nvCxnSpPr>
-          <p:cNvPr id="107" name="e2_0" descr="Editable line; source id e2_0"/>
-          <p:cNvCxnSpPr/>
-          <p:nvPr/>
-        </p:nvCxnSpPr>
-        <p:spPr>
-          <a:xfrm>
-            <a:off x="10159999" y="3127374"/>
-            <a:ext cx="0" cy="412750"/>
-          </a:xfrm>
-          <a:prstGeom prst="line">
-            <a:avLst/>
-          </a:prstGeom>
-          <a:ln w="14287">
-            <a:solidFill>
-              <a:srgbClr val="4B5563"/>
-            </a:solidFill>
-          </a:ln>
-          <a:effectLst/>
-        </p:spPr>
-        <p:style>
-          <a:lnRef idx="2">
-            <a:schemeClr val="accent1"/>
-          </a:lnRef>
-          <a:fillRef idx="0">
-            <a:schemeClr val="accent1"/>
-          </a:fillRef>
-          <a:effectRef idx="0">
-            <a:schemeClr val="accent1"/>
-          </a:effectRef>
-          <a:fontRef idx="minor">
-            <a:schemeClr val="tx1"/>
-          </a:fontRef>
-        </p:style>
-      </p:cxnSp>
-      <p:cxnSp>
-        <p:nvCxnSpPr>
-          <p:cNvPr id="108" name="e2_1" descr="Editable line; source id e2_1"/>
-          <p:cNvCxnSpPr/>
-          <p:nvPr/>
-        </p:nvCxnSpPr>
-        <p:spPr>
-          <a:xfrm flipH="1">
-            <a:off x="2857499" y="3540124"/>
-            <a:ext cx="7302500" cy="0"/>
-          </a:xfrm>
-          <a:prstGeom prst="line">
-            <a:avLst/>
-          </a:prstGeom>
-          <a:ln w="14287">
-            <a:solidFill>
-              <a:srgbClr val="4B5563"/>
-            </a:solidFill>
-          </a:ln>
-          <a:effectLst/>
-        </p:spPr>
-        <p:style>
-          <a:lnRef idx="2">
-            <a:schemeClr val="accent1"/>
-          </a:lnRef>
-          <a:fillRef idx="0">
-            <a:schemeClr val="accent1"/>
-          </a:fillRef>
-          <a:effectRef idx="0">
-            <a:schemeClr val="accent1"/>
-          </a:effectRef>
-          <a:fontRef idx="minor">
-            <a:schemeClr val="tx1"/>
-          </a:fontRef>
-        </p:style>
-      </p:cxnSp>
-      <p:sp>
-        <p:nvSpPr>
-          <p:cNvPr id="109" name="e2_2" descr="Editable line; source id e2_2"/>
-          <p:cNvSpPr/>
-          <p:nvPr/>
-        </p:nvSpPr>
-        <p:spPr>
-          <a:xfrm>
-            <a:off x="2817812" y="3540125"/>
-            <a:ext cx="79375" cy="730250"/>
-          </a:xfrm>
-          <a:custGeom>
-            <a:avLst/>
-            <a:gdLst/>
-            <a:ahLst/>
-            <a:cxnLst/>
-            <a:rect l="l" t="t" r="r" b="b"/>
-            <a:pathLst>
-              <a:path w="10000" h="92000">
-                <a:moveTo>
-                  <a:pt x="5900" y="0"/>
-                </a:moveTo>
-                <a:lnTo>
-                  <a:pt x="5900" y="80000"/>
-                </a:lnTo>
-                <a:lnTo>
-                  <a:pt x="10000" y="80000"/>
-                </a:lnTo>
-                <a:lnTo>
-                  <a:pt x="5000" y="92000"/>
-                </a:lnTo>
-                <a:lnTo>
-                  <a:pt x="0" y="80000"/>
-                </a:lnTo>
-                <a:lnTo>
-                  <a:pt x="4100" y="80000"/>
-                </a:lnTo>
-                <a:lnTo>
-                  <a:pt x="4100" y="0"/>
-                </a:lnTo>
-                <a:close/>
-              </a:path>
-            </a:pathLst>
-          </a:custGeom>
-          <a:solidFill>
-            <a:srgbClr val="4B5563"/>
-          </a:solidFill>
-          <a:ln>
-            <a:noFill/>
-          </a:ln>
-          <a:effectLst/>
-        </p:spPr>
-        <p:style>
-          <a:lnRef idx="1">
-            <a:schemeClr val="accent1"/>
-          </a:lnRef>
-          <a:fillRef idx="3">
-            <a:schemeClr val="accent1"/>
-          </a:fillRef>
-          <a:effectRef idx="0">
-            <a:schemeClr val="accent1"/>
-          </a:effectRef>
-          <a:fontRef idx="minor">
-            <a:schemeClr val="lt1"/>
-          </a:fontRef>
-        </p:style>
-        <p:txBody>
-          <a:bodyPr rtlCol="0" anchor="ctr"/>
-          <a:lstStyle/>
-          <a:p>
-            <a:pPr algn="ctr"/>
-          </a:p>
-        </p:txBody>
-      </p:sp>
-      <p:sp>
-        <p:nvSpPr>
-          <p:cNvPr id="110" name="e2_p" descr="Editable shape; source id e2_p"/>
-          <p:cNvSpPr/>
-          <p:nvPr/>
-        </p:nvSpPr>
-        <p:spPr>
-          <a:xfrm>
-            <a:off x="5524499" y="3381374"/>
-            <a:ext cx="1976437" cy="309562"/>
-          </a:xfrm>
-          <a:prstGeom prst="roundRect">
-            <a:avLst>
-              <a:gd name="adj" fmla="val 50000"/>
-            </a:avLst>
-          </a:prstGeom>
-          <a:solidFill>
-            <a:srgbClr val="FFFFFF"/>
-          </a:solidFill>
-          <a:ln w="8731">
-            <a:solidFill>
-              <a:srgbClr val="CBD3DA"/>
-            </a:solidFill>
-          </a:ln>
-          <a:effectLst/>
-        </p:spPr>
-        <p:style>
-          <a:lnRef idx="1">
-            <a:schemeClr val="accent1"/>
-          </a:lnRef>
-          <a:fillRef idx="3">
-            <a:schemeClr val="accent1"/>
-          </a:fillRef>
-          <a:effectRef idx="0">
-            <a:schemeClr val="accent1"/>
-          </a:effectRef>
-          <a:fontRef idx="minor">
-            <a:schemeClr val="lt1"/>
-          </a:fontRef>
-        </p:style>
-        <p:txBody>
-          <a:bodyPr rtlCol="0" anchor="ctr"/>
-          <a:lstStyle/>
-          <a:p>
-            <a:pPr algn="ctr"/>
-          </a:p>
-        </p:txBody>
-      </p:sp>
-      <p:sp>
-        <p:nvSpPr>
-          <p:cNvPr id="111" name="e2_p_t" descr="Editable text; source id e2_p_t"/>
-          <p:cNvSpPr txBox="1"/>
-          <p:nvPr/>
-        </p:nvSpPr>
-        <p:spPr>
-          <a:xfrm>
-            <a:off x="5603874" y="3413124"/>
-            <a:ext cx="1817687" cy="246062"/>
-          </a:xfrm>
-          <a:prstGeom prst="rect">
-            <a:avLst/>
-          </a:prstGeom>
-          <a:noFill/>
-          <a:effectLst/>
-        </p:spPr>
-        <p:txBody>
-          <a:bodyPr wrap="none" anchor="ctr" tIns="0" rIns="0" bIns="0" lIns="0" anchorCtr="0" vertOverflow="overflow">
-            <a:noAutofit/>
-          </a:bodyPr>
-          <a:lstStyle/>
-          <a:p>
-            <a:pPr algn="ctr" fontAlgn="base">
-              <a:lnSpc>
-                <a:spcPts val="1187"/>
-              </a:lnSpc>
-              <a:spcBef>
-                <a:spcPts val="0"/>
-              </a:spcBef>
-              <a:spcAft>
-                <a:spcPts val="0"/>
-              </a:spcAft>
-              <a:defRPr sz="999" b="0" i="0" lang="zh-CN" dirty="0">
-                <a:solidFill>
-                  <a:srgbClr val="3F4854"/>
-                </a:solidFill>
-                <a:latin typeface="DejaVu Sans"/>
-                <a:ea typeface="DejaVu Sans"/>
-                <a:cs typeface="DejaVu Sans"/>
-              </a:defRPr>
-            </a:pPr>
-            <a:r>
-              <a:rPr sz="999" b="0" i="0" lang="zh-CN" dirty="0">
-                <a:solidFill>
-                  <a:srgbClr val="3F4854"/>
+                  <a:srgbClr val="27303A"/>
                 </a:solidFill>
                 <a:latin typeface="DejaVu Sans"/>
                 <a:ea typeface="DejaVu Sans"/>

--- a/media/figstudio/bzso_roadmap/roadmap_bazn2si2o7_en_editable.pptx
+++ b/media/figstudio/bzso_roadmap/roadmap_bazn2si2o7_en_editable.pptx
@@ -7,7 +7,7 @@
   <p:sldIdLst>
     <p:sldId id="256" r:id="rId7"/>
   </p:sldIdLst>
-  <p:sldSz cx="12191999" cy="7143749" type="screen4x3"/>
+  <p:sldSz cx="12191999" cy="6524624" type="screen4x3"/>
   <p:notesSz cx="6858000" cy="9144000"/>
   <p:defaultTextStyle>
     <a:defPPr>
@@ -502,7 +502,7 @@
           <a:lstStyle/>
           <a:p>
             <a:r>
-              <a:t>BaZn2Si2O7 · Reading roadmap of this review (round 5, F02).</a:t>
+              <a:t>BaZn2Si2O7 本文的行文路线图（第六轮：印刷字号 + 内容定尺寸；3+3 两行） [paper=bzso] [print_width_pt=451.4]</a:t>
             </a:r>
           </a:p>
         </p:txBody>
@@ -3524,12 +3524,12 @@
         </p:nvSpPr>
         <p:spPr>
           <a:xfrm>
-            <a:off x="238124" y="317499"/>
-            <a:ext cx="11715749" cy="3032124"/>
+            <a:off x="206374" y="206374"/>
+            <a:ext cx="11779249" cy="2746374"/>
           </a:xfrm>
           <a:prstGeom prst="roundRect">
             <a:avLst>
-              <a:gd name="adj" fmla="val 3664"/>
+              <a:gd name="adj" fmla="val 4046"/>
             </a:avLst>
           </a:prstGeom>
           <a:solidFill>
@@ -3572,8 +3572,8 @@
         </p:nvSpPr>
         <p:spPr>
           <a:xfrm>
-            <a:off x="380999" y="396874"/>
-            <a:ext cx="2595562" cy="357187"/>
+            <a:off x="349249" y="285749"/>
+            <a:ext cx="2778124" cy="380999"/>
           </a:xfrm>
           <a:prstGeom prst="rect">
             <a:avLst/>
@@ -3589,7 +3589,7 @@
           <a:p>
             <a:pPr algn="l" fontAlgn="base">
               <a:lnSpc>
-                <a:spcPts val="1906"/>
+                <a:spcPts val="2046"/>
               </a:lnSpc>
               <a:spcBef>
                 <a:spcPts val="0"/>
@@ -3597,7 +3597,7 @@
               <a:spcAft>
                 <a:spcPts val="0"/>
               </a:spcAft>
-              <a:defRPr sz="1624" b="1" i="0" lang="zh-CN" dirty="0">
+              <a:defRPr sz="1749" b="1" i="0" lang="zh-CN" dirty="0">
                 <a:solidFill>
                   <a:srgbClr val="2B3E57"/>
                 </a:solidFill>
@@ -3607,7 +3607,7 @@
               </a:defRPr>
             </a:pPr>
             <a:r>
-              <a:rPr sz="1624" b="1" i="0" lang="zh-CN" dirty="0">
+              <a:rPr sz="1749" b="1" i="0" lang="zh-CN" dirty="0">
                 <a:solidFill>
                   <a:srgbClr val="2B3E57"/>
                 </a:solidFill>
@@ -3628,12 +3628,12 @@
         </p:nvSpPr>
         <p:spPr>
           <a:xfrm>
-            <a:off x="238124" y="3730624"/>
-            <a:ext cx="11715749" cy="3095624"/>
+            <a:off x="206374" y="3571874"/>
+            <a:ext cx="11779249" cy="2746374"/>
           </a:xfrm>
           <a:prstGeom prst="roundRect">
             <a:avLst>
-              <a:gd name="adj" fmla="val 3589"/>
+              <a:gd name="adj" fmla="val 4046"/>
             </a:avLst>
           </a:prstGeom>
           <a:solidFill>
@@ -3676,8 +3676,8 @@
         </p:nvSpPr>
         <p:spPr>
           <a:xfrm>
-            <a:off x="380999" y="3809999"/>
-            <a:ext cx="2468562" cy="357187"/>
+            <a:off x="349249" y="3651249"/>
+            <a:ext cx="2643187" cy="380999"/>
           </a:xfrm>
           <a:prstGeom prst="rect">
             <a:avLst/>
@@ -3693,7 +3693,7 @@
           <a:p>
             <a:pPr algn="l" fontAlgn="base">
               <a:lnSpc>
-                <a:spcPts val="1906"/>
+                <a:spcPts val="2046"/>
               </a:lnSpc>
               <a:spcBef>
                 <a:spcPts val="0"/>
@@ -3701,7 +3701,7 @@
               <a:spcAft>
                 <a:spcPts val="0"/>
               </a:spcAft>
-              <a:defRPr sz="1624" b="1" i="0" lang="zh-CN" dirty="0">
+              <a:defRPr sz="1749" b="1" i="0" lang="zh-CN" dirty="0">
                 <a:solidFill>
                   <a:srgbClr val="0F4F58"/>
                 </a:solidFill>
@@ -3711,7 +3711,7 @@
               </a:defRPr>
             </a:pPr>
             <a:r>
-              <a:rPr sz="1624" b="1" i="0" lang="zh-CN" dirty="0">
+              <a:rPr sz="1749" b="1" i="0" lang="zh-CN" dirty="0">
                 <a:solidFill>
                   <a:srgbClr val="0F4F58"/>
                 </a:solidFill>
@@ -3732,12 +3732,12 @@
         </p:nvSpPr>
         <p:spPr>
           <a:xfrm>
-            <a:off x="555624" y="888999"/>
-            <a:ext cx="3333749" cy="2206624"/>
+            <a:off x="333374" y="746124"/>
+            <a:ext cx="3492499" cy="2063749"/>
           </a:xfrm>
           <a:prstGeom prst="roundRect">
             <a:avLst>
-              <a:gd name="adj" fmla="val 3237"/>
+              <a:gd name="adj" fmla="val 3461"/>
             </a:avLst>
           </a:prstGeom>
           <a:solidFill>
@@ -3780,8 +3780,8 @@
         </p:nvSpPr>
         <p:spPr>
           <a:xfrm>
-            <a:off x="555624" y="888999"/>
-            <a:ext cx="79374" cy="2206624"/>
+            <a:off x="333374" y="746124"/>
+            <a:ext cx="79374" cy="2063749"/>
           </a:xfrm>
           <a:prstGeom prst="roundRect">
             <a:avLst>
@@ -3826,8 +3826,8 @@
         </p:nvSpPr>
         <p:spPr>
           <a:xfrm>
-            <a:off x="777874" y="1031874"/>
-            <a:ext cx="730249" cy="484187"/>
+            <a:off x="555624" y="888999"/>
+            <a:ext cx="873124" cy="492124"/>
           </a:xfrm>
           <a:prstGeom prst="rect">
             <a:avLst/>
@@ -3843,7 +3843,7 @@
           <a:p>
             <a:pPr algn="l" fontAlgn="base">
               <a:lnSpc>
-                <a:spcPts val="2624"/>
+                <a:spcPts val="2703"/>
               </a:lnSpc>
               <a:spcBef>
                 <a:spcPts val="0"/>
@@ -3851,7 +3851,7 @@
               <a:spcAft>
                 <a:spcPts val="0"/>
               </a:spcAft>
-              <a:defRPr sz="2249" b="1" i="0" lang="zh-CN" dirty="0">
+              <a:defRPr sz="2312" b="1" i="0" lang="zh-CN" dirty="0">
                 <a:solidFill>
                   <a:srgbClr val="2B3E57"/>
                 </a:solidFill>
@@ -3861,7 +3861,7 @@
               </a:defRPr>
             </a:pPr>
             <a:r>
-              <a:rPr sz="2249" b="1" i="0" lang="zh-CN" dirty="0">
+              <a:rPr sz="2312" b="1" i="0" lang="zh-CN" dirty="0">
                 <a:solidFill>
                   <a:srgbClr val="2B3E57"/>
                 </a:solidFill>
@@ -3882,13 +3882,13 @@
         </p:nvCxnSpPr>
         <p:spPr>
           <a:xfrm>
-            <a:off x="3238499" y="1055687"/>
-            <a:ext cx="293688" cy="190500"/>
+            <a:off x="3428999" y="928687"/>
+            <a:ext cx="206375" cy="134937"/>
           </a:xfrm>
           <a:prstGeom prst="line">
             <a:avLst/>
           </a:prstGeom>
-          <a:ln w="19716">
+          <a:ln w="18216">
             <a:solidFill>
               <a:srgbClr val="111A24"/>
             </a:solidFill>
@@ -3918,13 +3918,13 @@
         </p:nvCxnSpPr>
         <p:spPr>
           <a:xfrm flipH="1">
-            <a:off x="3397249" y="1246187"/>
-            <a:ext cx="134938" cy="396875"/>
+            <a:off x="3540124" y="1063624"/>
+            <a:ext cx="95250" cy="269875"/>
           </a:xfrm>
           <a:prstGeom prst="line">
             <a:avLst/>
           </a:prstGeom>
-          <a:ln w="19716">
+          <a:ln w="18216">
             <a:solidFill>
               <a:srgbClr val="111A24"/>
             </a:solidFill>
@@ -3954,13 +3954,13 @@
         </p:nvCxnSpPr>
         <p:spPr>
           <a:xfrm flipH="1">
-            <a:off x="3079749" y="1643062"/>
-            <a:ext cx="317500" cy="0"/>
+            <a:off x="3317874" y="1333499"/>
+            <a:ext cx="222250" cy="0"/>
           </a:xfrm>
           <a:prstGeom prst="line">
             <a:avLst/>
           </a:prstGeom>
-          <a:ln w="19716">
+          <a:ln w="18216">
             <a:solidFill>
               <a:srgbClr val="111A24"/>
             </a:solidFill>
@@ -3990,13 +3990,13 @@
         </p:nvCxnSpPr>
         <p:spPr>
           <a:xfrm flipH="1" flipV="1">
-            <a:off x="2944812" y="1246187"/>
-            <a:ext cx="134937" cy="396875"/>
+            <a:off x="3222624" y="1063624"/>
+            <a:ext cx="95250" cy="269875"/>
           </a:xfrm>
           <a:prstGeom prst="line">
             <a:avLst/>
           </a:prstGeom>
-          <a:ln w="19716">
+          <a:ln w="18216">
             <a:solidFill>
               <a:srgbClr val="111A24"/>
             </a:solidFill>
@@ -4026,13 +4026,13 @@
         </p:nvCxnSpPr>
         <p:spPr>
           <a:xfrm flipV="1">
-            <a:off x="2944812" y="1055687"/>
-            <a:ext cx="293687" cy="190500"/>
+            <a:off x="3222624" y="928687"/>
+            <a:ext cx="206375" cy="134937"/>
           </a:xfrm>
           <a:prstGeom prst="line">
             <a:avLst/>
           </a:prstGeom>
-          <a:ln w="19716">
+          <a:ln w="18216">
             <a:solidFill>
               <a:srgbClr val="111A24"/>
             </a:solidFill>
@@ -4062,13 +4062,13 @@
         </p:nvCxnSpPr>
         <p:spPr>
           <a:xfrm>
-            <a:off x="3238499" y="1055687"/>
-            <a:ext cx="0" cy="587375"/>
+            <a:off x="3428999" y="928687"/>
+            <a:ext cx="0" cy="404812"/>
           </a:xfrm>
           <a:prstGeom prst="line">
             <a:avLst/>
           </a:prstGeom>
-          <a:ln w="19716">
+          <a:ln w="18216">
             <a:solidFill>
               <a:srgbClr val="111A24"/>
             </a:solidFill>
@@ -4098,13 +4098,13 @@
         </p:nvCxnSpPr>
         <p:spPr>
           <a:xfrm>
-            <a:off x="2944812" y="1246187"/>
-            <a:ext cx="587375" cy="0"/>
+            <a:off x="3222624" y="1063624"/>
+            <a:ext cx="412750" cy="0"/>
           </a:xfrm>
           <a:prstGeom prst="line">
             <a:avLst/>
           </a:prstGeom>
-          <a:ln w="19716">
+          <a:ln w="18216">
             <a:solidFill>
               <a:srgbClr val="111A24"/>
             </a:solidFill>
@@ -4134,8 +4134,8 @@
         </p:nvSpPr>
         <p:spPr>
           <a:xfrm>
-            <a:off x="777874" y="1809749"/>
-            <a:ext cx="2968624" cy="341312"/>
+            <a:off x="555624" y="1460499"/>
+            <a:ext cx="3127374" cy="341312"/>
           </a:xfrm>
           <a:prstGeom prst="rect">
             <a:avLst/>
@@ -4190,8 +4190,8 @@
         </p:nvCxnSpPr>
         <p:spPr>
           <a:xfrm>
-            <a:off x="825499" y="2262187"/>
-            <a:ext cx="2873375" cy="0"/>
+            <a:off x="603249" y="1897062"/>
+            <a:ext cx="3032125" cy="0"/>
           </a:xfrm>
           <a:prstGeom prst="line">
             <a:avLst/>
@@ -4226,12 +4226,12 @@
         </p:nvSpPr>
         <p:spPr>
           <a:xfrm>
-            <a:off x="777874" y="2666999"/>
-            <a:ext cx="2968624" cy="285749"/>
+            <a:off x="555624" y="2008187"/>
+            <a:ext cx="3127374" cy="658812"/>
           </a:xfrm>
           <a:prstGeom prst="roundRect">
             <a:avLst>
-              <a:gd name="adj" fmla="val 16666"/>
+              <a:gd name="adj" fmla="val 7228"/>
             </a:avLst>
           </a:prstGeom>
           <a:solidFill>
@@ -4274,8 +4274,8 @@
         </p:nvSpPr>
         <p:spPr>
           <a:xfrm>
-            <a:off x="833437" y="2698749"/>
-            <a:ext cx="2857499" cy="222249"/>
+            <a:off x="611187" y="2039937"/>
+            <a:ext cx="3016249" cy="595312"/>
           </a:xfrm>
           <a:prstGeom prst="rect">
             <a:avLst/>
@@ -4291,7 +4291,7 @@
           <a:p>
             <a:pPr algn="ctr" fontAlgn="base">
               <a:lnSpc>
-                <a:spcPts val="1312"/>
+                <a:spcPts val="1765"/>
               </a:lnSpc>
               <a:spcBef>
                 <a:spcPts val="0"/>
@@ -4299,7 +4299,7 @@
               <a:spcAft>
                 <a:spcPts val="0"/>
               </a:spcAft>
-              <a:defRPr sz="1124" b="1" i="0" lang="zh-CN" dirty="0">
+              <a:defRPr sz="1499" b="0" i="0" lang="zh-CN" dirty="0">
                 <a:solidFill>
                   <a:srgbClr val="27303A"/>
                 </a:solidFill>
@@ -4309,7 +4309,7 @@
               </a:defRPr>
             </a:pPr>
             <a:r>
-              <a:rPr sz="1124" b="1" i="0" lang="zh-CN" dirty="0">
+              <a:rPr sz="1499" b="0" i="0" lang="zh-CN" dirty="0">
                 <a:solidFill>
                   <a:srgbClr val="27303A"/>
                 </a:solidFill>
@@ -4330,12 +4330,12 @@
         </p:nvSpPr>
         <p:spPr>
           <a:xfrm>
-            <a:off x="4524374" y="888999"/>
-            <a:ext cx="3333749" cy="2206624"/>
+            <a:off x="4349749" y="746124"/>
+            <a:ext cx="3492499" cy="2063749"/>
           </a:xfrm>
           <a:prstGeom prst="roundRect">
             <a:avLst>
-              <a:gd name="adj" fmla="val 3237"/>
+              <a:gd name="adj" fmla="val 3461"/>
             </a:avLst>
           </a:prstGeom>
           <a:solidFill>
@@ -4378,8 +4378,8 @@
         </p:nvSpPr>
         <p:spPr>
           <a:xfrm>
-            <a:off x="4524374" y="888999"/>
-            <a:ext cx="79374" cy="2206624"/>
+            <a:off x="4349749" y="746124"/>
+            <a:ext cx="79374" cy="2063749"/>
           </a:xfrm>
           <a:prstGeom prst="roundRect">
             <a:avLst>
@@ -4424,8 +4424,8 @@
         </p:nvSpPr>
         <p:spPr>
           <a:xfrm>
-            <a:off x="4746624" y="1031874"/>
-            <a:ext cx="730249" cy="484187"/>
+            <a:off x="4571999" y="888999"/>
+            <a:ext cx="873124" cy="492124"/>
           </a:xfrm>
           <a:prstGeom prst="rect">
             <a:avLst/>
@@ -4441,7 +4441,7 @@
           <a:p>
             <a:pPr algn="l" fontAlgn="base">
               <a:lnSpc>
-                <a:spcPts val="2624"/>
+                <a:spcPts val="2703"/>
               </a:lnSpc>
               <a:spcBef>
                 <a:spcPts val="0"/>
@@ -4449,7 +4449,7 @@
               <a:spcAft>
                 <a:spcPts val="0"/>
               </a:spcAft>
-              <a:defRPr sz="2249" b="1" i="0" lang="zh-CN" dirty="0">
+              <a:defRPr sz="2312" b="1" i="0" lang="zh-CN" dirty="0">
                 <a:solidFill>
                   <a:srgbClr val="2B3E57"/>
                 </a:solidFill>
@@ -4459,7 +4459,7 @@
               </a:defRPr>
             </a:pPr>
             <a:r>
-              <a:rPr sz="2249" b="1" i="0" lang="zh-CN" dirty="0">
+              <a:rPr sz="2312" b="1" i="0" lang="zh-CN" dirty="0">
                 <a:solidFill>
                   <a:srgbClr val="2B3E57"/>
                 </a:solidFill>
@@ -4480,13 +4480,13 @@
         </p:nvCxnSpPr>
         <p:spPr>
           <a:xfrm>
-            <a:off x="7000874" y="1222374"/>
-            <a:ext cx="71438" cy="388938"/>
+            <a:off x="7302499" y="1039812"/>
+            <a:ext cx="47625" cy="277812"/>
           </a:xfrm>
           <a:prstGeom prst="line">
             <a:avLst/>
           </a:prstGeom>
-          <a:ln w="19716">
+          <a:ln w="18216">
             <a:solidFill>
               <a:srgbClr val="111A24"/>
             </a:solidFill>
@@ -4516,13 +4516,13 @@
         </p:nvCxnSpPr>
         <p:spPr>
           <a:xfrm>
-            <a:off x="7072312" y="1611312"/>
-            <a:ext cx="269875" cy="0"/>
+            <a:off x="7350124" y="1317624"/>
+            <a:ext cx="190500" cy="0"/>
           </a:xfrm>
           <a:prstGeom prst="line">
             <a:avLst/>
           </a:prstGeom>
-          <a:ln w="19716">
+          <a:ln w="18216">
             <a:solidFill>
               <a:srgbClr val="111A24"/>
             </a:solidFill>
@@ -4552,13 +4552,13 @@
         </p:nvCxnSpPr>
         <p:spPr>
           <a:xfrm flipV="1">
-            <a:off x="7342187" y="1222374"/>
-            <a:ext cx="71437" cy="388938"/>
+            <a:off x="7540624" y="1039812"/>
+            <a:ext cx="47625" cy="277812"/>
           </a:xfrm>
           <a:prstGeom prst="line">
             <a:avLst/>
           </a:prstGeom>
-          <a:ln w="19716">
+          <a:ln w="18216">
             <a:solidFill>
               <a:srgbClr val="111A24"/>
             </a:solidFill>
@@ -4588,13 +4588,13 @@
         </p:nvCxnSpPr>
         <p:spPr>
           <a:xfrm>
-            <a:off x="6961187" y="1222374"/>
-            <a:ext cx="492125" cy="0"/>
+            <a:off x="7270749" y="1039812"/>
+            <a:ext cx="349250" cy="0"/>
           </a:xfrm>
           <a:prstGeom prst="line">
             <a:avLst/>
           </a:prstGeom>
-          <a:ln w="19716">
+          <a:ln w="18216">
             <a:solidFill>
               <a:srgbClr val="111A24"/>
             </a:solidFill>
@@ -4624,8 +4624,8 @@
         </p:nvSpPr>
         <p:spPr>
           <a:xfrm>
-            <a:off x="4746624" y="1809749"/>
-            <a:ext cx="2968624" cy="341312"/>
+            <a:off x="4571999" y="1460499"/>
+            <a:ext cx="3127374" cy="341312"/>
           </a:xfrm>
           <a:prstGeom prst="rect">
             <a:avLst/>
@@ -4680,8 +4680,8 @@
         </p:nvCxnSpPr>
         <p:spPr>
           <a:xfrm>
-            <a:off x="4794249" y="2262187"/>
-            <a:ext cx="2873375" cy="0"/>
+            <a:off x="4619624" y="1897062"/>
+            <a:ext cx="3032125" cy="0"/>
           </a:xfrm>
           <a:prstGeom prst="line">
             <a:avLst/>
@@ -4716,12 +4716,12 @@
         </p:nvSpPr>
         <p:spPr>
           <a:xfrm>
-            <a:off x="4746624" y="2666999"/>
-            <a:ext cx="2968624" cy="285749"/>
+            <a:off x="4571999" y="2008187"/>
+            <a:ext cx="3127374" cy="658812"/>
           </a:xfrm>
           <a:prstGeom prst="roundRect">
             <a:avLst>
-              <a:gd name="adj" fmla="val 16666"/>
+              <a:gd name="adj" fmla="val 7228"/>
             </a:avLst>
           </a:prstGeom>
           <a:solidFill>
@@ -4764,8 +4764,8 @@
         </p:nvSpPr>
         <p:spPr>
           <a:xfrm>
-            <a:off x="4802187" y="2698749"/>
-            <a:ext cx="2857499" cy="222249"/>
+            <a:off x="4627562" y="2039937"/>
+            <a:ext cx="3016249" cy="595312"/>
           </a:xfrm>
           <a:prstGeom prst="rect">
             <a:avLst/>
@@ -4781,7 +4781,7 @@
           <a:p>
             <a:pPr algn="ctr" fontAlgn="base">
               <a:lnSpc>
-                <a:spcPts val="1312"/>
+                <a:spcPts val="1765"/>
               </a:lnSpc>
               <a:spcBef>
                 <a:spcPts val="0"/>
@@ -4789,7 +4789,7 @@
               <a:spcAft>
                 <a:spcPts val="0"/>
               </a:spcAft>
-              <a:defRPr sz="1124" b="1" i="0" lang="zh-CN" dirty="0">
+              <a:defRPr sz="1499" b="0" i="0" lang="zh-CN" dirty="0">
                 <a:solidFill>
                   <a:srgbClr val="27303A"/>
                 </a:solidFill>
@@ -4799,7 +4799,7 @@
               </a:defRPr>
             </a:pPr>
             <a:r>
-              <a:rPr sz="1124" b="1" i="0" lang="zh-CN" dirty="0">
+              <a:rPr sz="1499" b="0" i="0" lang="zh-CN" dirty="0">
                 <a:solidFill>
                   <a:srgbClr val="27303A"/>
                 </a:solidFill>
@@ -4820,12 +4820,12 @@
         </p:nvSpPr>
         <p:spPr>
           <a:xfrm>
-            <a:off x="8493124" y="888999"/>
-            <a:ext cx="3333749" cy="2206624"/>
+            <a:off x="8366124" y="746124"/>
+            <a:ext cx="3492499" cy="2063749"/>
           </a:xfrm>
           <a:prstGeom prst="roundRect">
             <a:avLst>
-              <a:gd name="adj" fmla="val 3237"/>
+              <a:gd name="adj" fmla="val 3461"/>
             </a:avLst>
           </a:prstGeom>
           <a:solidFill>
@@ -4868,8 +4868,8 @@
         </p:nvSpPr>
         <p:spPr>
           <a:xfrm>
-            <a:off x="8493124" y="888999"/>
-            <a:ext cx="79374" cy="2206624"/>
+            <a:off x="8366124" y="746124"/>
+            <a:ext cx="79374" cy="2063749"/>
           </a:xfrm>
           <a:prstGeom prst="roundRect">
             <a:avLst>
@@ -4914,8 +4914,8 @@
         </p:nvSpPr>
         <p:spPr>
           <a:xfrm>
-            <a:off x="8715374" y="1031874"/>
-            <a:ext cx="730249" cy="484187"/>
+            <a:off x="8588374" y="888999"/>
+            <a:ext cx="873124" cy="492124"/>
           </a:xfrm>
           <a:prstGeom prst="rect">
             <a:avLst/>
@@ -4931,7 +4931,7 @@
           <a:p>
             <a:pPr algn="l" fontAlgn="base">
               <a:lnSpc>
-                <a:spcPts val="2624"/>
+                <a:spcPts val="2703"/>
               </a:lnSpc>
               <a:spcBef>
                 <a:spcPts val="0"/>
@@ -4939,7 +4939,7 @@
               <a:spcAft>
                 <a:spcPts val="0"/>
               </a:spcAft>
-              <a:defRPr sz="2249" b="1" i="0" lang="zh-CN" dirty="0">
+              <a:defRPr sz="2312" b="1" i="0" lang="zh-CN" dirty="0">
                 <a:solidFill>
                   <a:srgbClr val="2B3E57"/>
                 </a:solidFill>
@@ -4949,7 +4949,7 @@
               </a:defRPr>
             </a:pPr>
             <a:r>
-              <a:rPr sz="2249" b="1" i="0" lang="zh-CN" dirty="0">
+              <a:rPr sz="2312" b="1" i="0" lang="zh-CN" dirty="0">
                 <a:solidFill>
                   <a:srgbClr val="2B3E57"/>
                 </a:solidFill>
@@ -4970,13 +4970,13 @@
         </p:nvCxnSpPr>
         <p:spPr>
           <a:xfrm>
-            <a:off x="11175999" y="1103312"/>
-            <a:ext cx="277813" cy="127000"/>
+            <a:off x="11461749" y="960437"/>
+            <a:ext cx="190500" cy="87312"/>
           </a:xfrm>
           <a:prstGeom prst="line">
             <a:avLst/>
           </a:prstGeom>
-          <a:ln w="19716">
+          <a:ln w="18216">
             <a:solidFill>
               <a:srgbClr val="111A24"/>
             </a:solidFill>
@@ -5006,13 +5006,13 @@
         </p:nvCxnSpPr>
         <p:spPr>
           <a:xfrm flipH="1">
-            <a:off x="11175999" y="1230312"/>
-            <a:ext cx="277813" cy="134937"/>
+            <a:off x="11461749" y="1047749"/>
+            <a:ext cx="190500" cy="95250"/>
           </a:xfrm>
           <a:prstGeom prst="line">
             <a:avLst/>
           </a:prstGeom>
-          <a:ln w="19716">
+          <a:ln w="18216">
             <a:solidFill>
               <a:srgbClr val="111A24"/>
             </a:solidFill>
@@ -5042,13 +5042,13 @@
         </p:nvCxnSpPr>
         <p:spPr>
           <a:xfrm flipH="1" flipV="1">
-            <a:off x="10898187" y="1230312"/>
-            <a:ext cx="277812" cy="134937"/>
+            <a:off x="11271249" y="1047749"/>
+            <a:ext cx="190500" cy="95250"/>
           </a:xfrm>
           <a:prstGeom prst="line">
             <a:avLst/>
           </a:prstGeom>
-          <a:ln w="19716">
+          <a:ln w="18216">
             <a:solidFill>
               <a:srgbClr val="111A24"/>
             </a:solidFill>
@@ -5078,13 +5078,13 @@
         </p:nvCxnSpPr>
         <p:spPr>
           <a:xfrm flipV="1">
-            <a:off x="10898187" y="1103312"/>
-            <a:ext cx="277812" cy="127000"/>
+            <a:off x="11271249" y="960437"/>
+            <a:ext cx="190500" cy="87312"/>
           </a:xfrm>
           <a:prstGeom prst="line">
             <a:avLst/>
           </a:prstGeom>
-          <a:ln w="19716">
+          <a:ln w="18216">
             <a:solidFill>
               <a:srgbClr val="111A24"/>
             </a:solidFill>
@@ -5114,13 +5114,13 @@
         </p:nvCxnSpPr>
         <p:spPr>
           <a:xfrm>
-            <a:off x="11175999" y="1262062"/>
-            <a:ext cx="277813" cy="134937"/>
+            <a:off x="11461749" y="1071562"/>
+            <a:ext cx="190500" cy="95250"/>
           </a:xfrm>
           <a:prstGeom prst="line">
             <a:avLst/>
           </a:prstGeom>
-          <a:ln w="19716">
+          <a:ln w="18216">
             <a:solidFill>
               <a:srgbClr val="111A24"/>
             </a:solidFill>
@@ -5150,13 +5150,13 @@
         </p:nvCxnSpPr>
         <p:spPr>
           <a:xfrm flipH="1">
-            <a:off x="11175999" y="1396999"/>
-            <a:ext cx="277813" cy="127000"/>
+            <a:off x="11461749" y="1166812"/>
+            <a:ext cx="190500" cy="87312"/>
           </a:xfrm>
           <a:prstGeom prst="line">
             <a:avLst/>
           </a:prstGeom>
-          <a:ln w="19716">
+          <a:ln w="18216">
             <a:solidFill>
               <a:srgbClr val="111A24"/>
             </a:solidFill>
@@ -5186,13 +5186,13 @@
         </p:nvCxnSpPr>
         <p:spPr>
           <a:xfrm flipH="1" flipV="1">
-            <a:off x="10898187" y="1396999"/>
-            <a:ext cx="277812" cy="127000"/>
+            <a:off x="11271249" y="1166812"/>
+            <a:ext cx="190500" cy="87312"/>
           </a:xfrm>
           <a:prstGeom prst="line">
             <a:avLst/>
           </a:prstGeom>
-          <a:ln w="19716">
+          <a:ln w="18216">
             <a:solidFill>
               <a:srgbClr val="111A24"/>
             </a:solidFill>
@@ -5222,13 +5222,13 @@
         </p:nvCxnSpPr>
         <p:spPr>
           <a:xfrm flipV="1">
-            <a:off x="10898187" y="1262062"/>
-            <a:ext cx="277812" cy="134937"/>
+            <a:off x="11271249" y="1071562"/>
+            <a:ext cx="190500" cy="95250"/>
           </a:xfrm>
           <a:prstGeom prst="line">
             <a:avLst/>
           </a:prstGeom>
-          <a:ln w="19716">
+          <a:ln w="18216">
             <a:solidFill>
               <a:srgbClr val="111A24"/>
             </a:solidFill>
@@ -5258,13 +5258,13 @@
         </p:nvCxnSpPr>
         <p:spPr>
           <a:xfrm>
-            <a:off x="11175999" y="1420812"/>
-            <a:ext cx="277813" cy="134937"/>
+            <a:off x="11461749" y="1182687"/>
+            <a:ext cx="190500" cy="95250"/>
           </a:xfrm>
           <a:prstGeom prst="line">
             <a:avLst/>
           </a:prstGeom>
-          <a:ln w="19716">
+          <a:ln w="18216">
             <a:solidFill>
               <a:srgbClr val="111A24"/>
             </a:solidFill>
@@ -5294,13 +5294,13 @@
         </p:nvCxnSpPr>
         <p:spPr>
           <a:xfrm flipH="1">
-            <a:off x="11175999" y="1555749"/>
-            <a:ext cx="277813" cy="127000"/>
+            <a:off x="11461749" y="1277937"/>
+            <a:ext cx="190500" cy="87312"/>
           </a:xfrm>
           <a:prstGeom prst="line">
             <a:avLst/>
           </a:prstGeom>
-          <a:ln w="19716">
+          <a:ln w="18216">
             <a:solidFill>
               <a:srgbClr val="111A24"/>
             </a:solidFill>
@@ -5330,13 +5330,13 @@
         </p:nvCxnSpPr>
         <p:spPr>
           <a:xfrm flipH="1" flipV="1">
-            <a:off x="10898187" y="1555749"/>
-            <a:ext cx="277812" cy="127000"/>
+            <a:off x="11271249" y="1277937"/>
+            <a:ext cx="190500" cy="87312"/>
           </a:xfrm>
           <a:prstGeom prst="line">
             <a:avLst/>
           </a:prstGeom>
-          <a:ln w="19716">
+          <a:ln w="18216">
             <a:solidFill>
               <a:srgbClr val="111A24"/>
             </a:solidFill>
@@ -5366,13 +5366,13 @@
         </p:nvCxnSpPr>
         <p:spPr>
           <a:xfrm flipV="1">
-            <a:off x="10898187" y="1420812"/>
-            <a:ext cx="277812" cy="134937"/>
+            <a:off x="11271249" y="1182687"/>
+            <a:ext cx="190500" cy="95250"/>
           </a:xfrm>
           <a:prstGeom prst="line">
             <a:avLst/>
           </a:prstGeom>
-          <a:ln w="19716">
+          <a:ln w="18216">
             <a:solidFill>
               <a:srgbClr val="111A24"/>
             </a:solidFill>
@@ -5402,8 +5402,8 @@
         </p:nvSpPr>
         <p:spPr>
           <a:xfrm>
-            <a:off x="8715374" y="1809749"/>
-            <a:ext cx="2968624" cy="341312"/>
+            <a:off x="8588374" y="1460499"/>
+            <a:ext cx="3127374" cy="341312"/>
           </a:xfrm>
           <a:prstGeom prst="rect">
             <a:avLst/>
@@ -5458,8 +5458,8 @@
         </p:nvCxnSpPr>
         <p:spPr>
           <a:xfrm>
-            <a:off x="8762999" y="2262187"/>
-            <a:ext cx="2873375" cy="0"/>
+            <a:off x="8635999" y="1897062"/>
+            <a:ext cx="3032125" cy="0"/>
           </a:xfrm>
           <a:prstGeom prst="line">
             <a:avLst/>
@@ -5494,12 +5494,12 @@
         </p:nvSpPr>
         <p:spPr>
           <a:xfrm>
-            <a:off x="8715374" y="2666999"/>
-            <a:ext cx="2968624" cy="285749"/>
+            <a:off x="8588374" y="2008187"/>
+            <a:ext cx="3127374" cy="658812"/>
           </a:xfrm>
           <a:prstGeom prst="roundRect">
             <a:avLst>
-              <a:gd name="adj" fmla="val 16666"/>
+              <a:gd name="adj" fmla="val 7228"/>
             </a:avLst>
           </a:prstGeom>
           <a:solidFill>
@@ -5542,8 +5542,8 @@
         </p:nvSpPr>
         <p:spPr>
           <a:xfrm>
-            <a:off x="8770937" y="2698749"/>
-            <a:ext cx="2857499" cy="222249"/>
+            <a:off x="8643937" y="2039937"/>
+            <a:ext cx="3016249" cy="595312"/>
           </a:xfrm>
           <a:prstGeom prst="rect">
             <a:avLst/>
@@ -5559,7 +5559,7 @@
           <a:p>
             <a:pPr algn="ctr" fontAlgn="base">
               <a:lnSpc>
-                <a:spcPts val="1312"/>
+                <a:spcPts val="1765"/>
               </a:lnSpc>
               <a:spcBef>
                 <a:spcPts val="0"/>
@@ -5567,7 +5567,7 @@
               <a:spcAft>
                 <a:spcPts val="0"/>
               </a:spcAft>
-              <a:defRPr sz="1124" b="1" i="0" lang="zh-CN" dirty="0">
+              <a:defRPr sz="1499" b="0" i="0" lang="zh-CN" dirty="0">
                 <a:solidFill>
                   <a:srgbClr val="27303A"/>
                 </a:solidFill>
@@ -5577,7 +5577,7 @@
               </a:defRPr>
             </a:pPr>
             <a:r>
-              <a:rPr sz="1124" b="1" i="0" lang="zh-CN" dirty="0">
+              <a:rPr sz="1499" b="0" i="0" lang="zh-CN" dirty="0">
                 <a:solidFill>
                   <a:srgbClr val="27303A"/>
                 </a:solidFill>
@@ -5598,12 +5598,12 @@
         </p:nvSpPr>
         <p:spPr>
           <a:xfrm>
-            <a:off x="555624" y="4302124"/>
-            <a:ext cx="3333749" cy="2206624"/>
+            <a:off x="333374" y="4111624"/>
+            <a:ext cx="3492499" cy="2063749"/>
           </a:xfrm>
           <a:prstGeom prst="roundRect">
             <a:avLst>
-              <a:gd name="adj" fmla="val 3237"/>
+              <a:gd name="adj" fmla="val 3461"/>
             </a:avLst>
           </a:prstGeom>
           <a:solidFill>
@@ -5646,8 +5646,8 @@
         </p:nvSpPr>
         <p:spPr>
           <a:xfrm>
-            <a:off x="555624" y="4302124"/>
-            <a:ext cx="79374" cy="2206624"/>
+            <a:off x="333374" y="4111624"/>
+            <a:ext cx="79374" cy="2063749"/>
           </a:xfrm>
           <a:prstGeom prst="roundRect">
             <a:avLst>
@@ -5692,8 +5692,8 @@
         </p:nvSpPr>
         <p:spPr>
           <a:xfrm>
-            <a:off x="777874" y="4444999"/>
-            <a:ext cx="730249" cy="484187"/>
+            <a:off x="555624" y="4254499"/>
+            <a:ext cx="873124" cy="492124"/>
           </a:xfrm>
           <a:prstGeom prst="rect">
             <a:avLst/>
@@ -5709,7 +5709,7 @@
           <a:p>
             <a:pPr algn="l" fontAlgn="base">
               <a:lnSpc>
-                <a:spcPts val="2624"/>
+                <a:spcPts val="2703"/>
               </a:lnSpc>
               <a:spcBef>
                 <a:spcPts val="0"/>
@@ -5717,7 +5717,7 @@
               <a:spcAft>
                 <a:spcPts val="0"/>
               </a:spcAft>
-              <a:defRPr sz="2249" b="1" i="0" lang="zh-CN" dirty="0">
+              <a:defRPr sz="2312" b="1" i="0" lang="zh-CN" dirty="0">
                 <a:solidFill>
                   <a:srgbClr val="0F4F58"/>
                 </a:solidFill>
@@ -5727,7 +5727,7 @@
               </a:defRPr>
             </a:pPr>
             <a:r>
-              <a:rPr sz="2249" b="1" i="0" lang="zh-CN" dirty="0">
+              <a:rPr sz="2312" b="1" i="0" lang="zh-CN" dirty="0">
                 <a:solidFill>
                   <a:srgbClr val="0F4F58"/>
                 </a:solidFill>
@@ -5748,14 +5748,14 @@
         </p:nvSpPr>
         <p:spPr>
           <a:xfrm>
-            <a:off x="3135312" y="4468812"/>
-            <a:ext cx="206374" cy="206374"/>
+            <a:off x="3357562" y="4294187"/>
+            <a:ext cx="142874" cy="142874"/>
           </a:xfrm>
           <a:prstGeom prst="rect">
             <a:avLst/>
           </a:prstGeom>
           <a:noFill/>
-          <a:ln w="19716">
+          <a:ln w="18216">
             <a:solidFill>
               <a:srgbClr val="111A24"/>
             </a:solidFill>
@@ -5792,14 +5792,14 @@
         </p:nvSpPr>
         <p:spPr>
           <a:xfrm>
-            <a:off x="2920999" y="4849812"/>
-            <a:ext cx="206374" cy="206374"/>
+            <a:off x="3206749" y="4556124"/>
+            <a:ext cx="142874" cy="142874"/>
           </a:xfrm>
           <a:prstGeom prst="rect">
             <a:avLst/>
           </a:prstGeom>
           <a:noFill/>
-          <a:ln w="19716">
+          <a:ln w="18216">
             <a:solidFill>
               <a:srgbClr val="111A24"/>
             </a:solidFill>
@@ -5836,14 +5836,14 @@
         </p:nvSpPr>
         <p:spPr>
           <a:xfrm>
-            <a:off x="3357562" y="4849812"/>
-            <a:ext cx="206374" cy="206374"/>
+            <a:off x="3508374" y="4556124"/>
+            <a:ext cx="142874" cy="142874"/>
           </a:xfrm>
           <a:prstGeom prst="rect">
             <a:avLst/>
           </a:prstGeom>
           <a:noFill/>
-          <a:ln w="19716">
+          <a:ln w="18216">
             <a:solidFill>
               <a:srgbClr val="111A24"/>
             </a:solidFill>
@@ -5880,13 +5880,13 @@
         </p:nvCxnSpPr>
         <p:spPr>
           <a:xfrm flipH="1">
-            <a:off x="3016249" y="4675187"/>
-            <a:ext cx="222250" cy="174625"/>
+            <a:off x="3278187" y="4437062"/>
+            <a:ext cx="150812" cy="119062"/>
           </a:xfrm>
           <a:prstGeom prst="line">
             <a:avLst/>
           </a:prstGeom>
-          <a:ln w="19716">
+          <a:ln w="18216">
             <a:solidFill>
               <a:srgbClr val="111A24"/>
             </a:solidFill>
@@ -5916,13 +5916,13 @@
         </p:nvCxnSpPr>
         <p:spPr>
           <a:xfrm>
-            <a:off x="3238499" y="4675187"/>
-            <a:ext cx="222250" cy="174625"/>
+            <a:off x="3428999" y="4437062"/>
+            <a:ext cx="150813" cy="119062"/>
           </a:xfrm>
           <a:prstGeom prst="line">
             <a:avLst/>
           </a:prstGeom>
-          <a:ln w="19716">
+          <a:ln w="18216">
             <a:solidFill>
               <a:srgbClr val="111A24"/>
             </a:solidFill>
@@ -5952,8 +5952,8 @@
         </p:nvSpPr>
         <p:spPr>
           <a:xfrm>
-            <a:off x="777874" y="5222874"/>
-            <a:ext cx="2968624" cy="341312"/>
+            <a:off x="555624" y="4825999"/>
+            <a:ext cx="3127374" cy="341312"/>
           </a:xfrm>
           <a:prstGeom prst="rect">
             <a:avLst/>
@@ -6008,8 +6008,8 @@
         </p:nvCxnSpPr>
         <p:spPr>
           <a:xfrm>
-            <a:off x="825499" y="5675312"/>
-            <a:ext cx="2873375" cy="0"/>
+            <a:off x="603249" y="5262562"/>
+            <a:ext cx="3032125" cy="0"/>
           </a:xfrm>
           <a:prstGeom prst="line">
             <a:avLst/>
@@ -6044,12 +6044,12 @@
         </p:nvSpPr>
         <p:spPr>
           <a:xfrm>
-            <a:off x="777874" y="6080124"/>
-            <a:ext cx="2968624" cy="285749"/>
+            <a:off x="555624" y="5373687"/>
+            <a:ext cx="3127374" cy="658812"/>
           </a:xfrm>
           <a:prstGeom prst="roundRect">
             <a:avLst>
-              <a:gd name="adj" fmla="val 16666"/>
+              <a:gd name="adj" fmla="val 7228"/>
             </a:avLst>
           </a:prstGeom>
           <a:solidFill>
@@ -6092,8 +6092,8 @@
         </p:nvSpPr>
         <p:spPr>
           <a:xfrm>
-            <a:off x="833437" y="6111874"/>
-            <a:ext cx="2857499" cy="222249"/>
+            <a:off x="611187" y="5405437"/>
+            <a:ext cx="3016249" cy="595312"/>
           </a:xfrm>
           <a:prstGeom prst="rect">
             <a:avLst/>
@@ -6109,7 +6109,7 @@
           <a:p>
             <a:pPr algn="ctr" fontAlgn="base">
               <a:lnSpc>
-                <a:spcPts val="1468"/>
+                <a:spcPts val="1765"/>
               </a:lnSpc>
               <a:spcBef>
                 <a:spcPts val="0"/>
@@ -6117,7 +6117,7 @@
               <a:spcAft>
                 <a:spcPts val="0"/>
               </a:spcAft>
-              <a:defRPr sz="1249" b="1" i="0" lang="zh-CN" dirty="0">
+              <a:defRPr sz="1499" b="0" i="0" lang="zh-CN" dirty="0">
                 <a:solidFill>
                   <a:srgbClr val="27303A"/>
                 </a:solidFill>
@@ -6127,7 +6127,7 @@
               </a:defRPr>
             </a:pPr>
             <a:r>
-              <a:rPr sz="1249" b="1" i="0" lang="zh-CN" dirty="0">
+              <a:rPr sz="1499" b="0" i="0" lang="zh-CN" dirty="0">
                 <a:solidFill>
                   <a:srgbClr val="27303A"/>
                 </a:solidFill>
@@ -6148,12 +6148,12 @@
         </p:nvSpPr>
         <p:spPr>
           <a:xfrm>
-            <a:off x="4524374" y="4302124"/>
-            <a:ext cx="3333749" cy="2206624"/>
+            <a:off x="4349749" y="4111624"/>
+            <a:ext cx="3492499" cy="2063749"/>
           </a:xfrm>
           <a:prstGeom prst="roundRect">
             <a:avLst>
-              <a:gd name="adj" fmla="val 3237"/>
+              <a:gd name="adj" fmla="val 3461"/>
             </a:avLst>
           </a:prstGeom>
           <a:solidFill>
@@ -6196,8 +6196,8 @@
         </p:nvSpPr>
         <p:spPr>
           <a:xfrm>
-            <a:off x="4524374" y="4302124"/>
-            <a:ext cx="79374" cy="2206624"/>
+            <a:off x="4349749" y="4111624"/>
+            <a:ext cx="79374" cy="2063749"/>
           </a:xfrm>
           <a:prstGeom prst="roundRect">
             <a:avLst>
@@ -6242,8 +6242,8 @@
         </p:nvSpPr>
         <p:spPr>
           <a:xfrm>
-            <a:off x="4746624" y="4444999"/>
-            <a:ext cx="730249" cy="484187"/>
+            <a:off x="4571999" y="4254499"/>
+            <a:ext cx="873124" cy="492124"/>
           </a:xfrm>
           <a:prstGeom prst="rect">
             <a:avLst/>
@@ -6259,7 +6259,7 @@
           <a:p>
             <a:pPr algn="l" fontAlgn="base">
               <a:lnSpc>
-                <a:spcPts val="2624"/>
+                <a:spcPts val="2703"/>
               </a:lnSpc>
               <a:spcBef>
                 <a:spcPts val="0"/>
@@ -6267,7 +6267,7 @@
               <a:spcAft>
                 <a:spcPts val="0"/>
               </a:spcAft>
-              <a:defRPr sz="2249" b="1" i="0" lang="zh-CN" dirty="0">
+              <a:defRPr sz="2312" b="1" i="0" lang="zh-CN" dirty="0">
                 <a:solidFill>
                   <a:srgbClr val="7A5410"/>
                 </a:solidFill>
@@ -6277,7 +6277,7 @@
               </a:defRPr>
             </a:pPr>
             <a:r>
-              <a:rPr sz="2249" b="1" i="0" lang="zh-CN" dirty="0">
+              <a:rPr sz="2312" b="1" i="0" lang="zh-CN" dirty="0">
                 <a:solidFill>
                   <a:srgbClr val="7A5410"/>
                 </a:solidFill>
@@ -6298,13 +6298,13 @@
         </p:nvCxnSpPr>
         <p:spPr>
           <a:xfrm>
-            <a:off x="7207249" y="4516437"/>
-            <a:ext cx="0" cy="468312"/>
+            <a:off x="7445374" y="4325937"/>
+            <a:ext cx="0" cy="325437"/>
           </a:xfrm>
           <a:prstGeom prst="line">
             <a:avLst/>
           </a:prstGeom>
-          <a:ln w="19716">
+          <a:ln w="18216">
             <a:solidFill>
               <a:srgbClr val="111A24"/>
             </a:solidFill>
@@ -6334,13 +6334,13 @@
         </p:nvCxnSpPr>
         <p:spPr>
           <a:xfrm>
-            <a:off x="6961187" y="4619624"/>
-            <a:ext cx="492125" cy="0"/>
+            <a:off x="7270749" y="4397374"/>
+            <a:ext cx="349250" cy="0"/>
           </a:xfrm>
           <a:prstGeom prst="line">
             <a:avLst/>
           </a:prstGeom>
-          <a:ln w="19716">
+          <a:ln w="18216">
             <a:solidFill>
               <a:srgbClr val="111A24"/>
             </a:solidFill>
@@ -6370,13 +6370,13 @@
         </p:nvCxnSpPr>
         <p:spPr>
           <a:xfrm flipH="1">
-            <a:off x="6889749" y="4619624"/>
-            <a:ext cx="71438" cy="158750"/>
+            <a:off x="7223124" y="4397374"/>
+            <a:ext cx="47625" cy="111125"/>
           </a:xfrm>
           <a:prstGeom prst="line">
             <a:avLst/>
           </a:prstGeom>
-          <a:ln w="19716">
+          <a:ln w="18216">
             <a:solidFill>
               <a:srgbClr val="111A24"/>
             </a:solidFill>
@@ -6406,13 +6406,13 @@
         </p:nvCxnSpPr>
         <p:spPr>
           <a:xfrm>
-            <a:off x="6889749" y="4778374"/>
-            <a:ext cx="142875" cy="0"/>
+            <a:off x="7223124" y="4508499"/>
+            <a:ext cx="103188" cy="0"/>
           </a:xfrm>
           <a:prstGeom prst="line">
             <a:avLst/>
           </a:prstGeom>
-          <a:ln w="19716">
+          <a:ln w="18216">
             <a:solidFill>
               <a:srgbClr val="111A24"/>
             </a:solidFill>
@@ -6442,13 +6442,13 @@
         </p:nvCxnSpPr>
         <p:spPr>
           <a:xfrm flipH="1" flipV="1">
-            <a:off x="6961187" y="4619624"/>
-            <a:ext cx="71437" cy="158750"/>
+            <a:off x="7270749" y="4397374"/>
+            <a:ext cx="55563" cy="111125"/>
           </a:xfrm>
           <a:prstGeom prst="line">
             <a:avLst/>
           </a:prstGeom>
-          <a:ln w="19716">
+          <a:ln w="18216">
             <a:solidFill>
               <a:srgbClr val="111A24"/>
             </a:solidFill>
@@ -6478,13 +6478,13 @@
         </p:nvCxnSpPr>
         <p:spPr>
           <a:xfrm flipH="1">
-            <a:off x="7381874" y="4619624"/>
-            <a:ext cx="71438" cy="158750"/>
+            <a:off x="7564437" y="4397374"/>
+            <a:ext cx="55562" cy="111125"/>
           </a:xfrm>
           <a:prstGeom prst="line">
             <a:avLst/>
           </a:prstGeom>
-          <a:ln w="19716">
+          <a:ln w="18216">
             <a:solidFill>
               <a:srgbClr val="111A24"/>
             </a:solidFill>
@@ -6514,13 +6514,13 @@
         </p:nvCxnSpPr>
         <p:spPr>
           <a:xfrm>
-            <a:off x="7381874" y="4778374"/>
-            <a:ext cx="142875" cy="0"/>
+            <a:off x="7564437" y="4508499"/>
+            <a:ext cx="103187" cy="0"/>
           </a:xfrm>
           <a:prstGeom prst="line">
             <a:avLst/>
           </a:prstGeom>
-          <a:ln w="19716">
+          <a:ln w="18216">
             <a:solidFill>
               <a:srgbClr val="111A24"/>
             </a:solidFill>
@@ -6550,13 +6550,13 @@
         </p:nvCxnSpPr>
         <p:spPr>
           <a:xfrm flipH="1" flipV="1">
-            <a:off x="7453312" y="4619624"/>
-            <a:ext cx="71437" cy="158750"/>
+            <a:off x="7619999" y="4397374"/>
+            <a:ext cx="47625" cy="111125"/>
           </a:xfrm>
           <a:prstGeom prst="line">
             <a:avLst/>
           </a:prstGeom>
-          <a:ln w="19716">
+          <a:ln w="18216">
             <a:solidFill>
               <a:srgbClr val="111A24"/>
             </a:solidFill>
@@ -6586,13 +6586,13 @@
         </p:nvCxnSpPr>
         <p:spPr>
           <a:xfrm>
-            <a:off x="7064374" y="5040312"/>
-            <a:ext cx="285750" cy="0"/>
+            <a:off x="7342187" y="4691062"/>
+            <a:ext cx="206375" cy="0"/>
           </a:xfrm>
           <a:prstGeom prst="line">
             <a:avLst/>
           </a:prstGeom>
-          <a:ln w="19716">
+          <a:ln w="18216">
             <a:solidFill>
               <a:srgbClr val="111A24"/>
             </a:solidFill>
@@ -6622,8 +6622,8 @@
         </p:nvSpPr>
         <p:spPr>
           <a:xfrm>
-            <a:off x="4746624" y="5222874"/>
-            <a:ext cx="2968624" cy="341312"/>
+            <a:off x="4571999" y="4825999"/>
+            <a:ext cx="3127374" cy="341312"/>
           </a:xfrm>
           <a:prstGeom prst="rect">
             <a:avLst/>
@@ -6678,8 +6678,8 @@
         </p:nvCxnSpPr>
         <p:spPr>
           <a:xfrm>
-            <a:off x="4794249" y="5675312"/>
-            <a:ext cx="2873375" cy="0"/>
+            <a:off x="4619624" y="5262562"/>
+            <a:ext cx="3032125" cy="0"/>
           </a:xfrm>
           <a:prstGeom prst="line">
             <a:avLst/>
@@ -6714,12 +6714,12 @@
         </p:nvSpPr>
         <p:spPr>
           <a:xfrm>
-            <a:off x="4746624" y="6080124"/>
-            <a:ext cx="2968624" cy="285749"/>
+            <a:off x="4571999" y="5373687"/>
+            <a:ext cx="3127374" cy="658812"/>
           </a:xfrm>
           <a:prstGeom prst="roundRect">
             <a:avLst>
-              <a:gd name="adj" fmla="val 16666"/>
+              <a:gd name="adj" fmla="val 7228"/>
             </a:avLst>
           </a:prstGeom>
           <a:solidFill>
@@ -6762,8 +6762,8 @@
         </p:nvSpPr>
         <p:spPr>
           <a:xfrm>
-            <a:off x="4802187" y="6111874"/>
-            <a:ext cx="2857499" cy="222249"/>
+            <a:off x="4627562" y="5405437"/>
+            <a:ext cx="3016249" cy="595312"/>
           </a:xfrm>
           <a:prstGeom prst="rect">
             <a:avLst/>
@@ -6779,7 +6779,7 @@
           <a:p>
             <a:pPr algn="ctr" fontAlgn="base">
               <a:lnSpc>
-                <a:spcPts val="1468"/>
+                <a:spcPts val="1765"/>
               </a:lnSpc>
               <a:spcBef>
                 <a:spcPts val="0"/>
@@ -6787,7 +6787,7 @@
               <a:spcAft>
                 <a:spcPts val="0"/>
               </a:spcAft>
-              <a:defRPr sz="1249" b="1" i="0" lang="zh-CN" dirty="0">
+              <a:defRPr sz="1499" b="0" i="0" lang="zh-CN" dirty="0">
                 <a:solidFill>
                   <a:srgbClr val="27303A"/>
                 </a:solidFill>
@@ -6797,7 +6797,7 @@
               </a:defRPr>
             </a:pPr>
             <a:r>
-              <a:rPr sz="1249" b="1" i="0" lang="zh-CN" dirty="0">
+              <a:rPr sz="1499" b="0" i="0" lang="zh-CN" dirty="0">
                 <a:solidFill>
                   <a:srgbClr val="27303A"/>
                 </a:solidFill>
@@ -6818,12 +6818,12 @@
         </p:nvSpPr>
         <p:spPr>
           <a:xfrm>
-            <a:off x="8493124" y="4302124"/>
-            <a:ext cx="3333749" cy="2206624"/>
+            <a:off x="8366124" y="4111624"/>
+            <a:ext cx="3492499" cy="2063749"/>
           </a:xfrm>
           <a:prstGeom prst="roundRect">
             <a:avLst>
-              <a:gd name="adj" fmla="val 3237"/>
+              <a:gd name="adj" fmla="val 3461"/>
             </a:avLst>
           </a:prstGeom>
           <a:solidFill>
@@ -6866,8 +6866,8 @@
         </p:nvSpPr>
         <p:spPr>
           <a:xfrm>
-            <a:off x="8493124" y="4302124"/>
-            <a:ext cx="79374" cy="2206624"/>
+            <a:off x="8366124" y="4111624"/>
+            <a:ext cx="79374" cy="2063749"/>
           </a:xfrm>
           <a:prstGeom prst="roundRect">
             <a:avLst>
@@ -6912,8 +6912,8 @@
         </p:nvSpPr>
         <p:spPr>
           <a:xfrm>
-            <a:off x="8715374" y="4444999"/>
-            <a:ext cx="730249" cy="484187"/>
+            <a:off x="8588374" y="4254499"/>
+            <a:ext cx="873124" cy="492124"/>
           </a:xfrm>
           <a:prstGeom prst="rect">
             <a:avLst/>
@@ -6929,7 +6929,7 @@
           <a:p>
             <a:pPr algn="l" fontAlgn="base">
               <a:lnSpc>
-                <a:spcPts val="2624"/>
+                <a:spcPts val="2703"/>
               </a:lnSpc>
               <a:spcBef>
                 <a:spcPts val="0"/>
@@ -6937,7 +6937,7 @@
               <a:spcAft>
                 <a:spcPts val="0"/>
               </a:spcAft>
-              <a:defRPr sz="2249" b="1" i="0" lang="zh-CN" dirty="0">
+              <a:defRPr sz="2312" b="1" i="0" lang="zh-CN" dirty="0">
                 <a:solidFill>
                   <a:srgbClr val="0F4F58"/>
                 </a:solidFill>
@@ -6947,7 +6947,7 @@
               </a:defRPr>
             </a:pPr>
             <a:r>
-              <a:rPr sz="2249" b="1" i="0" lang="zh-CN" dirty="0">
+              <a:rPr sz="2312" b="1" i="0" lang="zh-CN" dirty="0">
                 <a:solidFill>
                   <a:srgbClr val="0F4F58"/>
                 </a:solidFill>
@@ -6968,14 +6968,14 @@
         </p:nvSpPr>
         <p:spPr>
           <a:xfrm>
-            <a:off x="10898187" y="4556124"/>
-            <a:ext cx="142874" cy="142874"/>
+            <a:off x="11271249" y="4357687"/>
+            <a:ext cx="103187" cy="103187"/>
           </a:xfrm>
           <a:prstGeom prst="rect">
             <a:avLst/>
           </a:prstGeom>
           <a:noFill/>
-          <a:ln w="19716">
+          <a:ln w="18216">
             <a:solidFill>
               <a:srgbClr val="111A24"/>
             </a:solidFill>
@@ -7012,13 +7012,13 @@
         </p:nvCxnSpPr>
         <p:spPr>
           <a:xfrm>
-            <a:off x="11128374" y="4635499"/>
-            <a:ext cx="341313" cy="0"/>
+            <a:off x="11429999" y="4405312"/>
+            <a:ext cx="238125" cy="0"/>
           </a:xfrm>
           <a:prstGeom prst="line">
             <a:avLst/>
           </a:prstGeom>
-          <a:ln w="19716">
+          <a:ln w="18216">
             <a:solidFill>
               <a:srgbClr val="111A24"/>
             </a:solidFill>
@@ -7048,13 +7048,13 @@
         </p:nvCxnSpPr>
         <p:spPr>
           <a:xfrm>
-            <a:off x="10929937" y="4643437"/>
-            <a:ext cx="31750" cy="31750"/>
+            <a:off x="11287124" y="4413249"/>
+            <a:ext cx="23813" cy="23813"/>
           </a:xfrm>
           <a:prstGeom prst="line">
             <a:avLst/>
           </a:prstGeom>
-          <a:ln w="19716">
+          <a:ln w="18216">
             <a:solidFill>
               <a:srgbClr val="111A24"/>
             </a:solidFill>
@@ -7084,13 +7084,13 @@
         </p:nvCxnSpPr>
         <p:spPr>
           <a:xfrm flipV="1">
-            <a:off x="10961687" y="4587874"/>
-            <a:ext cx="71437" cy="87313"/>
+            <a:off x="11310937" y="4373562"/>
+            <a:ext cx="47625" cy="63500"/>
           </a:xfrm>
           <a:prstGeom prst="line">
             <a:avLst/>
           </a:prstGeom>
-          <a:ln w="19716">
+          <a:ln w="18216">
             <a:solidFill>
               <a:srgbClr val="111A24"/>
             </a:solidFill>
@@ -7120,14 +7120,14 @@
         </p:nvSpPr>
         <p:spPr>
           <a:xfrm>
-            <a:off x="10898187" y="4746624"/>
-            <a:ext cx="142874" cy="142874"/>
+            <a:off x="11271249" y="4484687"/>
+            <a:ext cx="103187" cy="103187"/>
           </a:xfrm>
           <a:prstGeom prst="rect">
             <a:avLst/>
           </a:prstGeom>
           <a:noFill/>
-          <a:ln w="19716">
+          <a:ln w="18216">
             <a:solidFill>
               <a:srgbClr val="111A24"/>
             </a:solidFill>
@@ -7164,13 +7164,13 @@
         </p:nvCxnSpPr>
         <p:spPr>
           <a:xfrm>
-            <a:off x="11128374" y="4825999"/>
-            <a:ext cx="341313" cy="0"/>
+            <a:off x="11429999" y="4540249"/>
+            <a:ext cx="238125" cy="0"/>
           </a:xfrm>
           <a:prstGeom prst="line">
             <a:avLst/>
           </a:prstGeom>
-          <a:ln w="19716">
+          <a:ln w="18216">
             <a:solidFill>
               <a:srgbClr val="111A24"/>
             </a:solidFill>
@@ -7200,13 +7200,13 @@
         </p:nvCxnSpPr>
         <p:spPr>
           <a:xfrm>
-            <a:off x="10929937" y="4825999"/>
-            <a:ext cx="31750" cy="39688"/>
+            <a:off x="11287124" y="4540249"/>
+            <a:ext cx="23813" cy="31750"/>
           </a:xfrm>
           <a:prstGeom prst="line">
             <a:avLst/>
           </a:prstGeom>
-          <a:ln w="19716">
+          <a:ln w="18216">
             <a:solidFill>
               <a:srgbClr val="111A24"/>
             </a:solidFill>
@@ -7236,13 +7236,13 @@
         </p:nvCxnSpPr>
         <p:spPr>
           <a:xfrm flipV="1">
-            <a:off x="10961687" y="4778374"/>
-            <a:ext cx="71437" cy="87313"/>
+            <a:off x="11310937" y="4508499"/>
+            <a:ext cx="47625" cy="63500"/>
           </a:xfrm>
           <a:prstGeom prst="line">
             <a:avLst/>
           </a:prstGeom>
-          <a:ln w="19716">
+          <a:ln w="18216">
             <a:solidFill>
               <a:srgbClr val="111A24"/>
             </a:solidFill>
@@ -7272,14 +7272,14 @@
         </p:nvSpPr>
         <p:spPr>
           <a:xfrm>
-            <a:off x="10898187" y="4937124"/>
-            <a:ext cx="142874" cy="142874"/>
+            <a:off x="11271249" y="4619624"/>
+            <a:ext cx="103187" cy="103187"/>
           </a:xfrm>
           <a:prstGeom prst="rect">
             <a:avLst/>
           </a:prstGeom>
           <a:noFill/>
-          <a:ln w="19716">
+          <a:ln w="18216">
             <a:solidFill>
               <a:srgbClr val="111A24"/>
             </a:solidFill>
@@ -7316,13 +7316,13 @@
         </p:nvCxnSpPr>
         <p:spPr>
           <a:xfrm>
-            <a:off x="11128374" y="5008562"/>
-            <a:ext cx="341313" cy="0"/>
+            <a:off x="11429999" y="4667249"/>
+            <a:ext cx="238125" cy="0"/>
           </a:xfrm>
           <a:prstGeom prst="line">
             <a:avLst/>
           </a:prstGeom>
-          <a:ln w="19716">
+          <a:ln w="18216">
             <a:solidFill>
               <a:srgbClr val="111A24"/>
             </a:solidFill>
@@ -7352,8 +7352,8 @@
         </p:nvSpPr>
         <p:spPr>
           <a:xfrm>
-            <a:off x="8715374" y="5222874"/>
-            <a:ext cx="2968624" cy="341312"/>
+            <a:off x="8588374" y="4825999"/>
+            <a:ext cx="3127374" cy="341312"/>
           </a:xfrm>
           <a:prstGeom prst="rect">
             <a:avLst/>
@@ -7408,8 +7408,8 @@
         </p:nvCxnSpPr>
         <p:spPr>
           <a:xfrm>
-            <a:off x="8762999" y="5675312"/>
-            <a:ext cx="2873375" cy="0"/>
+            <a:off x="8635999" y="5262562"/>
+            <a:ext cx="3032125" cy="0"/>
           </a:xfrm>
           <a:prstGeom prst="line">
             <a:avLst/>
@@ -7444,12 +7444,12 @@
         </p:nvSpPr>
         <p:spPr>
           <a:xfrm>
-            <a:off x="8715374" y="6080124"/>
-            <a:ext cx="2968624" cy="285749"/>
+            <a:off x="8588374" y="5373687"/>
+            <a:ext cx="3127374" cy="658812"/>
           </a:xfrm>
           <a:prstGeom prst="roundRect">
             <a:avLst>
-              <a:gd name="adj" fmla="val 16666"/>
+              <a:gd name="adj" fmla="val 7228"/>
             </a:avLst>
           </a:prstGeom>
           <a:solidFill>
@@ -7492,8 +7492,8 @@
         </p:nvSpPr>
         <p:spPr>
           <a:xfrm>
-            <a:off x="8770937" y="6111874"/>
-            <a:ext cx="2857499" cy="222249"/>
+            <a:off x="8643937" y="5405437"/>
+            <a:ext cx="3016249" cy="595312"/>
           </a:xfrm>
           <a:prstGeom prst="rect">
             <a:avLst/>
@@ -7509,7 +7509,7 @@
           <a:p>
             <a:pPr algn="ctr" fontAlgn="base">
               <a:lnSpc>
-                <a:spcPts val="1046"/>
+                <a:spcPts val="1765"/>
               </a:lnSpc>
               <a:spcBef>
                 <a:spcPts val="0"/>
@@ -7517,7 +7517,7 @@
               <a:spcAft>
                 <a:spcPts val="0"/>
               </a:spcAft>
-              <a:defRPr sz="891" b="1" i="0" lang="zh-CN" dirty="0">
+              <a:defRPr sz="1499" b="0" i="0" lang="zh-CN" dirty="0">
                 <a:solidFill>
                   <a:srgbClr val="27303A"/>
                 </a:solidFill>
@@ -7527,7 +7527,7 @@
               </a:defRPr>
             </a:pPr>
             <a:r>
-              <a:rPr sz="891" b="1" i="0" lang="zh-CN" dirty="0">
+              <a:rPr sz="1499" b="0" i="0" lang="zh-CN" dirty="0">
                 <a:solidFill>
                   <a:srgbClr val="27303A"/>
                 </a:solidFill>
@@ -7535,7 +7535,39 @@
                 <a:ea typeface="DejaVu Sans"/>
                 <a:cs typeface="DejaVu Sans"/>
               </a:rPr>
-              <a:t>Phase diagram · structure · thermodynamics</a:t>
+              <a:t>Phase diagram · structure · </a:t>
+            </a:r>
+          </a:p>
+          <a:p>
+            <a:pPr algn="ctr" fontAlgn="base">
+              <a:lnSpc>
+                <a:spcPts val="1765"/>
+              </a:lnSpc>
+              <a:spcBef>
+                <a:spcPts val="0"/>
+              </a:spcBef>
+              <a:spcAft>
+                <a:spcPts val="0"/>
+              </a:spcAft>
+              <a:defRPr sz="1499" b="0" i="0" lang="zh-CN" dirty="0">
+                <a:solidFill>
+                  <a:srgbClr val="27303A"/>
+                </a:solidFill>
+                <a:latin typeface="DejaVu Sans"/>
+                <a:ea typeface="DejaVu Sans"/>
+                <a:cs typeface="DejaVu Sans"/>
+              </a:defRPr>
+            </a:pPr>
+            <a:r>
+              <a:rPr sz="1499" b="0" i="0" lang="zh-CN" dirty="0">
+                <a:solidFill>
+                  <a:srgbClr val="27303A"/>
+                </a:solidFill>
+                <a:latin typeface="DejaVu Sans"/>
+                <a:ea typeface="DejaVu Sans"/>
+                <a:cs typeface="DejaVu Sans"/>
+              </a:rPr>
+              <a:t>thermodynamics</a:t>
             </a:r>
           </a:p>
         </p:txBody>
@@ -7548,8 +7580,8 @@
         </p:nvSpPr>
         <p:spPr>
           <a:xfrm>
-            <a:off x="3952875" y="1944687"/>
-            <a:ext cx="508000" cy="95250"/>
+            <a:off x="3873500" y="1730375"/>
+            <a:ext cx="428625" cy="95250"/>
           </a:xfrm>
           <a:custGeom>
             <a:avLst/>
@@ -7558,24 +7590,24 @@
             <a:cxnLst/>
             <a:rect l="l" t="t" r="r" b="b"/>
             <a:pathLst>
-              <a:path w="64000" h="12000">
+              <a:path w="54000" h="12000">
                 <a:moveTo>
                   <a:pt x="0" y="4750"/>
                 </a:moveTo>
                 <a:lnTo>
-                  <a:pt x="49000" y="4750"/>
+                  <a:pt x="39000" y="4750"/>
                 </a:lnTo>
                 <a:lnTo>
-                  <a:pt x="49000" y="0"/>
+                  <a:pt x="39000" y="0"/>
                 </a:lnTo>
                 <a:lnTo>
-                  <a:pt x="64000" y="6000"/>
+                  <a:pt x="54000" y="6000"/>
                 </a:lnTo>
                 <a:lnTo>
-                  <a:pt x="49000" y="12000"/>
+                  <a:pt x="39000" y="12000"/>
                 </a:lnTo>
                 <a:lnTo>
-                  <a:pt x="49000" y="7250"/>
+                  <a:pt x="39000" y="7250"/>
                 </a:lnTo>
                 <a:lnTo>
                   <a:pt x="0" y="7250"/>
@@ -7622,8 +7654,8 @@
         </p:nvSpPr>
         <p:spPr>
           <a:xfrm>
-            <a:off x="3222624" y="460374"/>
-            <a:ext cx="1976437" cy="309562"/>
+            <a:off x="3413124" y="285749"/>
+            <a:ext cx="2817812" cy="380999"/>
           </a:xfrm>
           <a:prstGeom prst="roundRect">
             <a:avLst>
@@ -7670,8 +7702,8 @@
         </p:nvSpPr>
         <p:spPr>
           <a:xfrm>
-            <a:off x="3301999" y="492124"/>
-            <a:ext cx="1817687" cy="246062"/>
+            <a:off x="3492499" y="317499"/>
+            <a:ext cx="2659062" cy="317499"/>
           </a:xfrm>
           <a:prstGeom prst="rect">
             <a:avLst/>
@@ -7687,7 +7719,7 @@
           <a:p>
             <a:pPr algn="ctr" fontAlgn="base">
               <a:lnSpc>
-                <a:spcPts val="1187"/>
+                <a:spcPts val="1765"/>
               </a:lnSpc>
               <a:spcBef>
                 <a:spcPts val="0"/>
@@ -7695,7 +7727,7 @@
               <a:spcAft>
                 <a:spcPts val="0"/>
               </a:spcAft>
-              <a:defRPr sz="999" b="1" i="0" lang="zh-CN" dirty="0">
+              <a:defRPr sz="1499" b="0" i="0" lang="zh-CN" dirty="0">
                 <a:solidFill>
                   <a:srgbClr val="27303A"/>
                 </a:solidFill>
@@ -7705,7 +7737,7 @@
               </a:defRPr>
             </a:pPr>
             <a:r>
-              <a:rPr sz="999" b="1" i="0" lang="zh-CN" dirty="0">
+              <a:rPr sz="1499" b="0" i="0" lang="zh-CN" dirty="0">
                 <a:solidFill>
                   <a:srgbClr val="27303A"/>
                 </a:solidFill>
@@ -7726,8 +7758,8 @@
         </p:nvSpPr>
         <p:spPr>
           <a:xfrm>
-            <a:off x="7921625" y="1944687"/>
-            <a:ext cx="508000" cy="95250"/>
+            <a:off x="7889875" y="1730375"/>
+            <a:ext cx="428625" cy="95250"/>
           </a:xfrm>
           <a:custGeom>
             <a:avLst/>
@@ -7736,24 +7768,24 @@
             <a:cxnLst/>
             <a:rect l="l" t="t" r="r" b="b"/>
             <a:pathLst>
-              <a:path w="64000" h="12000">
+              <a:path w="54000" h="12000">
                 <a:moveTo>
                   <a:pt x="0" y="4750"/>
                 </a:moveTo>
                 <a:lnTo>
-                  <a:pt x="49000" y="4750"/>
+                  <a:pt x="39000" y="4750"/>
                 </a:lnTo>
                 <a:lnTo>
-                  <a:pt x="49000" y="0"/>
+                  <a:pt x="39000" y="0"/>
                 </a:lnTo>
                 <a:lnTo>
-                  <a:pt x="64000" y="6000"/>
+                  <a:pt x="54000" y="6000"/>
                 </a:lnTo>
                 <a:lnTo>
-                  <a:pt x="49000" y="12000"/>
+                  <a:pt x="39000" y="12000"/>
                 </a:lnTo>
                 <a:lnTo>
-                  <a:pt x="49000" y="7250"/>
+                  <a:pt x="39000" y="7250"/>
                 </a:lnTo>
                 <a:lnTo>
                   <a:pt x="0" y="7250"/>
@@ -7800,8 +7832,8 @@
         </p:nvSpPr>
         <p:spPr>
           <a:xfrm>
-            <a:off x="7429499" y="460374"/>
-            <a:ext cx="1500187" cy="309562"/>
+            <a:off x="7048499" y="285749"/>
+            <a:ext cx="2111374" cy="380999"/>
           </a:xfrm>
           <a:prstGeom prst="roundRect">
             <a:avLst>
@@ -7848,8 +7880,8 @@
         </p:nvSpPr>
         <p:spPr>
           <a:xfrm>
-            <a:off x="7508874" y="492124"/>
-            <a:ext cx="1341437" cy="246062"/>
+            <a:off x="7127874" y="317499"/>
+            <a:ext cx="1952624" cy="317499"/>
           </a:xfrm>
           <a:prstGeom prst="rect">
             <a:avLst/>
@@ -7865,7 +7897,7 @@
           <a:p>
             <a:pPr algn="ctr" fontAlgn="base">
               <a:lnSpc>
-                <a:spcPts val="1187"/>
+                <a:spcPts val="1765"/>
               </a:lnSpc>
               <a:spcBef>
                 <a:spcPts val="0"/>
@@ -7873,7 +7905,7 @@
               <a:spcAft>
                 <a:spcPts val="0"/>
               </a:spcAft>
-              <a:defRPr sz="999" b="1" i="0" lang="zh-CN" dirty="0">
+              <a:defRPr sz="1499" b="0" i="0" lang="zh-CN" dirty="0">
                 <a:solidFill>
                   <a:srgbClr val="27303A"/>
                 </a:solidFill>
@@ -7883,7 +7915,7 @@
               </a:defRPr>
             </a:pPr>
             <a:r>
-              <a:rPr sz="999" b="1" i="0" lang="zh-CN" dirty="0">
+              <a:rPr sz="1499" b="0" i="0" lang="zh-CN" dirty="0">
                 <a:solidFill>
                   <a:srgbClr val="27303A"/>
                 </a:solidFill>
@@ -7904,8 +7936,8 @@
         </p:nvSpPr>
         <p:spPr>
           <a:xfrm>
-            <a:off x="3952875" y="5357812"/>
-            <a:ext cx="508000" cy="95250"/>
+            <a:off x="3873500" y="5095875"/>
+            <a:ext cx="428625" cy="95250"/>
           </a:xfrm>
           <a:custGeom>
             <a:avLst/>
@@ -7914,24 +7946,24 @@
             <a:cxnLst/>
             <a:rect l="l" t="t" r="r" b="b"/>
             <a:pathLst>
-              <a:path w="64000" h="12000">
+              <a:path w="54000" h="12000">
                 <a:moveTo>
                   <a:pt x="0" y="4750"/>
                 </a:moveTo>
                 <a:lnTo>
-                  <a:pt x="49000" y="4750"/>
+                  <a:pt x="39000" y="4750"/>
                 </a:lnTo>
                 <a:lnTo>
-                  <a:pt x="49000" y="0"/>
+                  <a:pt x="39000" y="0"/>
                 </a:lnTo>
                 <a:lnTo>
-                  <a:pt x="64000" y="6000"/>
+                  <a:pt x="54000" y="6000"/>
                 </a:lnTo>
                 <a:lnTo>
-                  <a:pt x="49000" y="12000"/>
+                  <a:pt x="39000" y="12000"/>
                 </a:lnTo>
                 <a:lnTo>
-                  <a:pt x="49000" y="7250"/>
+                  <a:pt x="39000" y="7250"/>
                 </a:lnTo>
                 <a:lnTo>
                   <a:pt x="0" y="7250"/>
@@ -7978,8 +8010,8 @@
         </p:nvSpPr>
         <p:spPr>
           <a:xfrm>
-            <a:off x="3333749" y="3873499"/>
-            <a:ext cx="1738312" cy="309562"/>
+            <a:off x="3540124" y="3651249"/>
+            <a:ext cx="2468562" cy="380999"/>
           </a:xfrm>
           <a:prstGeom prst="roundRect">
             <a:avLst>
@@ -8026,8 +8058,8 @@
         </p:nvSpPr>
         <p:spPr>
           <a:xfrm>
-            <a:off x="3413124" y="3905249"/>
-            <a:ext cx="1579562" cy="246062"/>
+            <a:off x="3619499" y="3682999"/>
+            <a:ext cx="2309812" cy="317499"/>
           </a:xfrm>
           <a:prstGeom prst="rect">
             <a:avLst/>
@@ -8043,7 +8075,7 @@
           <a:p>
             <a:pPr algn="ctr" fontAlgn="base">
               <a:lnSpc>
-                <a:spcPts val="1187"/>
+                <a:spcPts val="1765"/>
               </a:lnSpc>
               <a:spcBef>
                 <a:spcPts val="0"/>
@@ -8051,7 +8083,7 @@
               <a:spcAft>
                 <a:spcPts val="0"/>
               </a:spcAft>
-              <a:defRPr sz="999" b="1" i="0" lang="zh-CN" dirty="0">
+              <a:defRPr sz="1499" b="0" i="0" lang="zh-CN" dirty="0">
                 <a:solidFill>
                   <a:srgbClr val="27303A"/>
                 </a:solidFill>
@@ -8061,7 +8093,7 @@
               </a:defRPr>
             </a:pPr>
             <a:r>
-              <a:rPr sz="999" b="1" i="0" lang="zh-CN" dirty="0">
+              <a:rPr sz="1499" b="0" i="0" lang="zh-CN" dirty="0">
                 <a:solidFill>
                   <a:srgbClr val="27303A"/>
                 </a:solidFill>
@@ -8082,8 +8114,8 @@
         </p:nvSpPr>
         <p:spPr>
           <a:xfrm>
-            <a:off x="7921625" y="5357812"/>
-            <a:ext cx="508000" cy="95250"/>
+            <a:off x="7889875" y="5095875"/>
+            <a:ext cx="428625" cy="95250"/>
           </a:xfrm>
           <a:custGeom>
             <a:avLst/>
@@ -8092,24 +8124,24 @@
             <a:cxnLst/>
             <a:rect l="l" t="t" r="r" b="b"/>
             <a:pathLst>
-              <a:path w="64000" h="12000">
+              <a:path w="54000" h="12000">
                 <a:moveTo>
                   <a:pt x="0" y="4750"/>
                 </a:moveTo>
                 <a:lnTo>
-                  <a:pt x="49000" y="4750"/>
+                  <a:pt x="39000" y="4750"/>
                 </a:lnTo>
                 <a:lnTo>
-                  <a:pt x="49000" y="0"/>
+                  <a:pt x="39000" y="0"/>
                 </a:lnTo>
                 <a:lnTo>
-                  <a:pt x="64000" y="6000"/>
+                  <a:pt x="54000" y="6000"/>
                 </a:lnTo>
                 <a:lnTo>
-                  <a:pt x="49000" y="12000"/>
+                  <a:pt x="39000" y="12000"/>
                 </a:lnTo>
                 <a:lnTo>
-                  <a:pt x="49000" y="7250"/>
+                  <a:pt x="39000" y="7250"/>
                 </a:lnTo>
                 <a:lnTo>
                   <a:pt x="0" y="7250"/>
@@ -8156,8 +8188,8 @@
         </p:nvSpPr>
         <p:spPr>
           <a:xfrm>
-            <a:off x="7635874" y="3873499"/>
-            <a:ext cx="1071562" cy="309562"/>
+            <a:off x="7373937" y="3651249"/>
+            <a:ext cx="1460499" cy="380999"/>
           </a:xfrm>
           <a:prstGeom prst="roundRect">
             <a:avLst>
@@ -8204,8 +8236,8 @@
         </p:nvSpPr>
         <p:spPr>
           <a:xfrm>
-            <a:off x="7715249" y="3905249"/>
-            <a:ext cx="912812" cy="246062"/>
+            <a:off x="7453312" y="3682999"/>
+            <a:ext cx="1301749" cy="317499"/>
           </a:xfrm>
           <a:prstGeom prst="rect">
             <a:avLst/>
@@ -8221,7 +8253,7 @@
           <a:p>
             <a:pPr algn="ctr" fontAlgn="base">
               <a:lnSpc>
-                <a:spcPts val="1187"/>
+                <a:spcPts val="1765"/>
               </a:lnSpc>
               <a:spcBef>
                 <a:spcPts val="0"/>
@@ -8229,7 +8261,7 @@
               <a:spcAft>
                 <a:spcPts val="0"/>
               </a:spcAft>
-              <a:defRPr sz="999" b="1" i="0" lang="zh-CN" dirty="0">
+              <a:defRPr sz="1499" b="0" i="0" lang="zh-CN" dirty="0">
                 <a:solidFill>
                   <a:srgbClr val="27303A"/>
                 </a:solidFill>
@@ -8239,7 +8271,7 @@
               </a:defRPr>
             </a:pPr>
             <a:r>
-              <a:rPr sz="999" b="1" i="0" lang="zh-CN" dirty="0">
+              <a:rPr sz="1499" b="0" i="0" lang="zh-CN" dirty="0">
                 <a:solidFill>
                   <a:srgbClr val="27303A"/>
                 </a:solidFill>
@@ -8260,8 +8292,8 @@
         </p:nvCxnSpPr>
         <p:spPr>
           <a:xfrm>
-            <a:off x="10159999" y="3127374"/>
-            <a:ext cx="0" cy="412750"/>
+            <a:off x="10112374" y="2841624"/>
+            <a:ext cx="0" cy="420688"/>
           </a:xfrm>
           <a:prstGeom prst="line">
             <a:avLst/>
@@ -8296,8 +8328,8 @@
         </p:nvCxnSpPr>
         <p:spPr>
           <a:xfrm flipH="1">
-            <a:off x="2857499" y="3540124"/>
-            <a:ext cx="7302500" cy="0"/>
+            <a:off x="3373437" y="3262312"/>
+            <a:ext cx="6738937" cy="0"/>
           </a:xfrm>
           <a:prstGeom prst="line">
             <a:avLst/>
@@ -8332,8 +8364,8 @@
         </p:nvSpPr>
         <p:spPr>
           <a:xfrm>
-            <a:off x="2809875" y="3540125"/>
-            <a:ext cx="95250" cy="730250"/>
+            <a:off x="3325812" y="3262312"/>
+            <a:ext cx="95250" cy="817562"/>
           </a:xfrm>
           <a:custGeom>
             <a:avLst/>
@@ -8342,24 +8374,24 @@
             <a:cxnLst/>
             <a:rect l="l" t="t" r="r" b="b"/>
             <a:pathLst>
-              <a:path w="12000" h="92000">
+              <a:path w="12000" h="103000">
                 <a:moveTo>
                   <a:pt x="7250" y="0"/>
                 </a:moveTo>
                 <a:lnTo>
-                  <a:pt x="7250" y="77000"/>
+                  <a:pt x="7250" y="88000"/>
                 </a:lnTo>
                 <a:lnTo>
-                  <a:pt x="12000" y="77000"/>
+                  <a:pt x="12000" y="88000"/>
                 </a:lnTo>
                 <a:lnTo>
-                  <a:pt x="6000" y="92000"/>
+                  <a:pt x="6000" y="103000"/>
                 </a:lnTo>
                 <a:lnTo>
-                  <a:pt x="0" y="77000"/>
+                  <a:pt x="0" y="88000"/>
                 </a:lnTo>
                 <a:lnTo>
-                  <a:pt x="4750" y="77000"/>
+                  <a:pt x="4750" y="88000"/>
                 </a:lnTo>
                 <a:lnTo>
                   <a:pt x="4750" y="0"/>
@@ -8406,8 +8438,8 @@
         </p:nvSpPr>
         <p:spPr>
           <a:xfrm>
-            <a:off x="5524499" y="3873499"/>
-            <a:ext cx="1976437" cy="309562"/>
+            <a:off x="4683124" y="3071812"/>
+            <a:ext cx="2817812" cy="380999"/>
           </a:xfrm>
           <a:prstGeom prst="roundRect">
             <a:avLst>
@@ -8454,8 +8486,8 @@
         </p:nvSpPr>
         <p:spPr>
           <a:xfrm>
-            <a:off x="5603874" y="3905249"/>
-            <a:ext cx="1817687" cy="246062"/>
+            <a:off x="4762499" y="3103562"/>
+            <a:ext cx="2659062" cy="317499"/>
           </a:xfrm>
           <a:prstGeom prst="rect">
             <a:avLst/>
@@ -8471,7 +8503,7 @@
           <a:p>
             <a:pPr algn="ctr" fontAlgn="base">
               <a:lnSpc>
-                <a:spcPts val="1187"/>
+                <a:spcPts val="1765"/>
               </a:lnSpc>
               <a:spcBef>
                 <a:spcPts val="0"/>
@@ -8479,7 +8511,7 @@
               <a:spcAft>
                 <a:spcPts val="0"/>
               </a:spcAft>
-              <a:defRPr sz="999" b="1" i="0" lang="zh-CN" dirty="0">
+              <a:defRPr sz="1499" b="0" i="0" lang="zh-CN" dirty="0">
                 <a:solidFill>
                   <a:srgbClr val="27303A"/>
                 </a:solidFill>
@@ -8489,7 +8521,7 @@
               </a:defRPr>
             </a:pPr>
             <a:r>
-              <a:rPr sz="999" b="1" i="0" lang="zh-CN" dirty="0">
+              <a:rPr sz="1499" b="0" i="0" lang="zh-CN" dirty="0">
                 <a:solidFill>
                   <a:srgbClr val="27303A"/>
                 </a:solidFill>
